--- a/presentations/AL_L06_SearchCorridor_Lesson.pptx
+++ b/presentations/AL_L06_SearchCorridor_Lesson.pptx
@@ -516,7 +516,7 @@
             <a:r>
               <a:rPr lang="en-US" dirty="0"/>
               <a:t>Lesson 6: Search corridor.
-Open the experience at revise360.co.uk and hand out AL_L06_Searchcorridor_Worksheet.docx.</a:t>
+Open the experience at revise360.co.uk and hand out AL_L06_SearchCorridor_Worksheet.docx.</a:t>
             </a:r>
             <a:endParaRPr lang="en-US" dirty="0"/>
           </a:p>

--- a/presentations/AL_L06_SearchCorridor_Lesson.pptx
+++ b/presentations/AL_L06_SearchCorridor_Lesson.pptx
@@ -19,9 +19,10 @@
     <p:sldId id="267" r:id="rId13"/>
     <p:sldId id="268" r:id="rId14"/>
     <p:sldId id="269" r:id="rId15"/>
+    <p:sldId id="270" r:id="rId16"/>
   </p:sldIdLst>
   <p:notesMasterIdLst>
-    <p:notesMasterId r:id="rId16"/>
+    <p:notesMasterId r:id="rId17"/>
   </p:notesMasterIdLst>
   <p:sldSz cx="12192000" cy="6858000"/>
   <p:notesSz cx="6858000" cy="12192000"/>
@@ -692,7 +693,13 @@
           <a:p>
             <a:r>
               <a:rPr lang="en-US" dirty="0"/>
-              <a:t>Make them commit to an answer on paper before they tap the star. Guessing first costs them the learning.</a:t>
+              <a:t>The answer is C: So they can use a much faster search that needs the list in order.
+Do not say it yet. Every pupil commits first - fingers, whiteboards or a show of hands on each letter in turn - and you count the split before anyone can change their mind.
+IF MOST OF THE CLASS IS RIGHT: say why it is right in one sentence and go straight on to the independent work.
+IF A SIGNIFICANT GROUP IS ON ONE WRONG LETTER: that option is the misconception to teach against before anyone goes on. Go back to station 4, Why it gets slow, and work through its example again, aloud, with the class watching, then re-ask this question.
+The course's own response to a wrong answer here: That faster search is the binary search, next lesson.
+A limitation, stated rather than papered over: one response covers every wrong option; it does not say what to revisit for each one. The course does not record what each separate wrong option means, and this slide does not invent it. Decide your own reteach for each option before the lesson; the options above are the start of it.
+This is a real activity from the experience (al-l06-s4-c2), so the wording here is the wording a pupil will see.</a:t>
             </a:r>
             <a:endParaRPr lang="en-US" dirty="0"/>
           </a:p>
@@ -780,7 +787,7 @@
           <a:p>
             <a:r>
               <a:rPr lang="en-US" dirty="0"/>
-              <a:t>Use these as a settler, or as something for early finishers to read in the experience.</a:t>
+              <a:t>Make them commit to an answer on paper before they tap the star. Guessing first costs them the learning.</a:t>
             </a:r>
             <a:endParaRPr lang="en-US" dirty="0"/>
           </a:p>
@@ -868,7 +875,7 @@
           <a:p>
             <a:r>
               <a:rPr lang="en-US" dirty="0"/>
-              <a:t>Timed and silent. Mark against the answer sheet, then ask students to record their weakest area.</a:t>
+              <a:t>Use these as a settler, or as something for early finishers to read in the experience.</a:t>
             </a:r>
             <a:endParaRPr lang="en-US" dirty="0"/>
           </a:p>
@@ -956,7 +963,7 @@
           <a:p>
             <a:r>
               <a:rPr lang="en-US" dirty="0"/>
-              <a:t>Students copy their score-screen breakdown onto the worksheet, then rate themselves here.</a:t>
+              <a:t>Timed and silent. Mark against the answer sheet, then ask students to record their weakest area.</a:t>
             </a:r>
             <a:endParaRPr lang="en-US" dirty="0"/>
           </a:p>
@@ -980,6 +987,94 @@
             <a:fld id="{F7021451-1387-4CA6-816F-3879F97B5CBC}" type="slidenum">
               <a:rPr lang="en-US"/>
               <a:t>14</a:t>
+            </a:fld>
+            <a:endParaRPr lang="en-US"/>
+          </a:p>
+        </p:txBody>
+      </p:sp>
+    </p:spTree>
+    <p:extLst>
+      <p:ext uri="{BB962C8B-B14F-4D97-AF65-F5344CB8AC3E}">
+        <p14:creationId xmlns:p14="http://schemas.microsoft.com/office/powerpoint/2010/main" val="1024086991"/>
+      </p:ext>
+    </p:extLst>
+  </p:cSld>
+  <p:clrMapOvr>
+    <a:masterClrMapping/>
+  </p:clrMapOvr>
+</p:notes>
+</file>
+
+<file path=ppt/notesSlides/notesSlide15.xml><?xml version="1.0" encoding="utf-8"?>
+<p:notes xmlns:a="http://schemas.openxmlformats.org/drawingml/2006/main" xmlns:r="http://schemas.openxmlformats.org/officeDocument/2006/relationships" xmlns:p="http://schemas.openxmlformats.org/presentationml/2006/main">
+  <p:cSld>
+    <p:spTree>
+      <p:nvGrpSpPr>
+        <p:cNvPr id="1" name=""/>
+        <p:cNvGrpSpPr/>
+        <p:nvPr/>
+      </p:nvGrpSpPr>
+      <p:grpSpPr>
+        <a:xfrm>
+          <a:off x="0" y="0"/>
+          <a:ext cx="0" cy="0"/>
+          <a:chOff x="0" y="0"/>
+          <a:chExt cx="0" cy="0"/>
+        </a:xfrm>
+      </p:grpSpPr>
+      <p:sp>
+        <p:nvSpPr>
+          <p:cNvPr id="2" name="Slide Image Placeholder 1"/>
+          <p:cNvSpPr>
+            <a:spLocks noGrp="1" noRot="1" noChangeAspect="1"/>
+          </p:cNvSpPr>
+          <p:nvPr>
+            <p:ph type="sldImg"/>
+          </p:nvPr>
+        </p:nvSpPr>
+        <p:spPr/>
+      </p:sp>
+      <p:sp>
+        <p:nvSpPr>
+          <p:cNvPr id="3" name="Notes Placeholder 2"/>
+          <p:cNvSpPr>
+            <a:spLocks noGrp="1"/>
+          </p:cNvSpPr>
+          <p:nvPr>
+            <p:ph type="body" idx="1"/>
+          </p:nvPr>
+        </p:nvSpPr>
+        <p:spPr/>
+        <p:txBody>
+          <a:bodyPr/>
+          <a:lstStyle/>
+          <a:p>
+            <a:r>
+              <a:rPr lang="en-US" dirty="0"/>
+              <a:t>Students copy their score-screen breakdown onto the worksheet, then rate themselves here.</a:t>
+            </a:r>
+            <a:endParaRPr lang="en-US" dirty="0"/>
+          </a:p>
+        </p:txBody>
+      </p:sp>
+      <p:sp>
+        <p:nvSpPr>
+          <p:cNvPr id="4" name="Slide Number Placeholder 3"/>
+          <p:cNvSpPr>
+            <a:spLocks noGrp="1"/>
+          </p:cNvSpPr>
+          <p:nvPr>
+            <p:ph type="sldNum" sz="quarter" idx="10"/>
+          </p:nvPr>
+        </p:nvSpPr>
+        <p:spPr/>
+        <p:txBody>
+          <a:bodyPr/>
+          <a:lstStyle/>
+          <a:p>
+            <a:fld id="{F7021451-1387-4CA6-816F-3879F97B5CBC}" type="slidenum">
+              <a:rPr lang="en-US"/>
+              <a:t>15</a:t>
             </a:fld>
             <a:endParaRPr lang="en-US"/>
           </a:p>
@@ -2949,12 +3044,12 @@
         </p:nvSpPr>
         <p:spPr>
           <a:xfrm>
-            <a:off x="502920" y="438912"/>
-            <a:ext cx="3108960" cy="502920"/>
+            <a:off x="502920" y="457200"/>
+            <a:ext cx="1051560" cy="420624"/>
           </a:xfrm>
           <a:prstGeom prst="roundRect">
             <a:avLst>
-              <a:gd name="adj" fmla="val 18182"/>
+              <a:gd name="adj" fmla="val 21739"/>
             </a:avLst>
           </a:prstGeom>
           <a:solidFill>
@@ -2971,8 +3066,8 @@
         </p:nvSpPr>
         <p:spPr>
           <a:xfrm>
-            <a:off x="502920" y="438912"/>
-            <a:ext cx="3108960" cy="502920"/>
+            <a:off x="502920" y="457200"/>
+            <a:ext cx="1051560" cy="420624"/>
           </a:xfrm>
           <a:prstGeom prst="rect">
             <a:avLst/>
@@ -2988,7 +3083,7 @@
               <a:buNone/>
             </a:pPr>
             <a:r>
-              <a:rPr lang="en-US" sz="1300" b="1" dirty="0">
+              <a:rPr lang="en-US" sz="1200" b="1" dirty="0">
                 <a:solidFill>
                   <a:srgbClr val="101828"/>
                 </a:solidFill>
@@ -2996,9 +3091,9 @@
                 <a:ea typeface="IBM Plex Mono" pitchFamily="34" charset="-122"/>
                 <a:cs typeface="IBM Plex Mono" pitchFamily="34" charset="-120"/>
               </a:rPr>
-              <a:t>★  FINAL CHALLENGE</a:t>
-            </a:r>
-            <a:endParaRPr lang="en-US" sz="1300" dirty="0"/>
+              <a:t>CHECK</a:t>
+            </a:r>
+            <a:endParaRPr lang="en-US" sz="1200" dirty="0"/>
           </a:p>
         </p:txBody>
       </p:sp>
@@ -3010,8 +3105,8 @@
         </p:nvSpPr>
         <p:spPr>
           <a:xfrm>
-            <a:off x="502920" y="1097280"/>
-            <a:ext cx="11155680" cy="731520"/>
+            <a:off x="1737360" y="457200"/>
+            <a:ext cx="9875520" cy="420624"/>
           </a:xfrm>
           <a:prstGeom prst="rect">
             <a:avLst/>
@@ -3027,34 +3122,76 @@
               <a:buNone/>
             </a:pPr>
             <a:r>
-              <a:rPr lang="en-US" sz="3400" b="1" dirty="0">
-                <a:solidFill>
-                  <a:srgbClr val="101828"/>
+              <a:rPr lang="en-US" sz="1500" dirty="0">
+                <a:solidFill>
+                  <a:srgbClr val="667085"/>
                 </a:solidFill>
                 <a:latin typeface="IBM Plex Sans" pitchFamily="34" charset="0"/>
                 <a:ea typeface="IBM Plex Sans" pitchFamily="34" charset="-122"/>
                 <a:cs typeface="IBM Plex Sans" pitchFamily="34" charset="-120"/>
               </a:rPr>
-              <a:t>Search it</a:t>
-            </a:r>
-            <a:endParaRPr lang="en-US" sz="3400" dirty="0"/>
-          </a:p>
-        </p:txBody>
-      </p:sp>
-      <p:sp>
-        <p:nvSpPr>
-          <p:cNvPr id="8" name="Shape 6"/>
+              <a:t>Hands down. Everyone commits.</a:t>
+            </a:r>
+            <a:endParaRPr lang="en-US" sz="1500" dirty="0"/>
+          </a:p>
+        </p:txBody>
+      </p:sp>
+      <p:sp>
+        <p:nvSpPr>
+          <p:cNvPr id="8" name="Text 6"/>
+          <p:cNvSpPr txBox="1"/>
+          <p:nvPr/>
+        </p:nvSpPr>
+        <p:spPr>
+          <a:xfrm>
+            <a:off x="502920" y="1097280"/>
+            <a:ext cx="11155680" cy="914400"/>
+          </a:xfrm>
+          <a:prstGeom prst="rect">
+            <a:avLst/>
+          </a:prstGeom>
+          <a:noFill/>
+          <a:ln/>
+        </p:spPr>
+        <p:txBody>
+          <a:bodyPr wrap="square" lIns="0" tIns="0" rIns="0" bIns="0" rtlCol="0" anchor="ctr"/>
+          <a:lstStyle/>
+          <a:p>
+            <a:pPr indent="0" marL="0">
+              <a:lnSpc>
+                <a:spcPct val="115000"/>
+              </a:lnSpc>
+              <a:buNone/>
+            </a:pPr>
+            <a:r>
+              <a:rPr lang="en-US" sz="2600" b="1" dirty="0">
+                <a:solidFill>
+                  <a:srgbClr val="101828"/>
+                </a:solidFill>
+                <a:latin typeface="IBM Plex Sans" pitchFamily="34" charset="0"/>
+                <a:ea typeface="IBM Plex Sans" pitchFamily="34" charset="-122"/>
+                <a:cs typeface="IBM Plex Sans" pitchFamily="34" charset="-120"/>
+              </a:rPr>
+              <a:t>Why do large systems sort their data?</a:t>
+            </a:r>
+            <a:endParaRPr lang="en-US" sz="2600" dirty="0"/>
+          </a:p>
+        </p:txBody>
+      </p:sp>
+      <p:sp>
+        <p:nvSpPr>
+          <p:cNvPr id="9" name="Shape 7"/>
           <p:cNvSpPr/>
           <p:nvPr/>
         </p:nvSpPr>
         <p:spPr>
           <a:xfrm>
-            <a:off x="502920" y="2011680"/>
-            <a:ext cx="11155680" cy="2194560"/>
+            <a:off x="502920" y="2148840"/>
+            <a:ext cx="11155680" cy="731520"/>
           </a:xfrm>
           <a:prstGeom prst="roundRect">
             <a:avLst>
-              <a:gd name="adj" fmla="val 5000"/>
+              <a:gd name="adj" fmla="val 15000"/>
             </a:avLst>
           </a:prstGeom>
           <a:solidFill>
@@ -3062,7 +3199,7 @@
           </a:solidFill>
           <a:ln w="15875">
             <a:solidFill>
-              <a:srgbClr val="2D63FF"/>
+              <a:srgbClr val="D9DEE7"/>
             </a:solidFill>
             <a:prstDash val="solid"/>
           </a:ln>
@@ -3070,14 +3207,75 @@
       </p:sp>
       <p:sp>
         <p:nvSpPr>
-          <p:cNvPr id="9" name="Text 7"/>
-          <p:cNvSpPr txBox="1"/>
-          <p:nvPr/>
-        </p:nvSpPr>
-        <p:spPr>
-          <a:xfrm>
-            <a:off x="1005840" y="2331720"/>
-            <a:ext cx="10149840" cy="1554480"/>
+          <p:cNvPr id="10" name="Shape 8"/>
+          <p:cNvSpPr/>
+          <p:nvPr/>
+        </p:nvSpPr>
+        <p:spPr>
+          <a:xfrm>
+            <a:off x="777240" y="2295144"/>
+            <a:ext cx="438912" cy="438912"/>
+          </a:xfrm>
+          <a:prstGeom prst="roundRect">
+            <a:avLst>
+              <a:gd name="adj" fmla="val 20833"/>
+            </a:avLst>
+          </a:prstGeom>
+          <a:solidFill>
+            <a:srgbClr val="EEF2FB"/>
+          </a:solidFill>
+          <a:ln/>
+        </p:spPr>
+      </p:sp>
+      <p:sp>
+        <p:nvSpPr>
+          <p:cNvPr id="11" name="Text 9"/>
+          <p:cNvSpPr txBox="1"/>
+          <p:nvPr/>
+        </p:nvSpPr>
+        <p:spPr>
+          <a:xfrm>
+            <a:off x="777240" y="2295144"/>
+            <a:ext cx="438912" cy="438912"/>
+          </a:xfrm>
+          <a:prstGeom prst="rect">
+            <a:avLst/>
+          </a:prstGeom>
+          <a:noFill/>
+          <a:ln/>
+        </p:spPr>
+        <p:txBody>
+          <a:bodyPr wrap="square" lIns="0" tIns="0" rIns="0" bIns="0" rtlCol="0" anchor="ctr"/>
+          <a:lstStyle/>
+          <a:p>
+            <a:pPr algn="ctr" indent="0" marL="0">
+              <a:buNone/>
+            </a:pPr>
+            <a:r>
+              <a:rPr lang="en-US" sz="1300" b="1" dirty="0">
+                <a:solidFill>
+                  <a:srgbClr val="2D63FF"/>
+                </a:solidFill>
+                <a:latin typeface="IBM Plex Mono" pitchFamily="34" charset="0"/>
+                <a:ea typeface="IBM Plex Mono" pitchFamily="34" charset="-122"/>
+                <a:cs typeface="IBM Plex Mono" pitchFamily="34" charset="-120"/>
+              </a:rPr>
+              <a:t>A</a:t>
+            </a:r>
+            <a:endParaRPr lang="en-US" sz="1300" dirty="0"/>
+          </a:p>
+        </p:txBody>
+      </p:sp>
+      <p:sp>
+        <p:nvSpPr>
+          <p:cNvPr id="12" name="Text 10"/>
+          <p:cNvSpPr txBox="1"/>
+          <p:nvPr/>
+        </p:nvSpPr>
+        <p:spPr>
+          <a:xfrm>
+            <a:off x="1417320" y="2148840"/>
+            <a:ext cx="10058400" cy="731520"/>
           </a:xfrm>
           <a:prstGeom prst="rect">
             <a:avLst/>
@@ -3091,12 +3289,12 @@
           <a:p>
             <a:pPr indent="0" marL="0">
               <a:lnSpc>
-                <a:spcPct val="130000"/>
+                <a:spcPct val="115000"/>
               </a:lnSpc>
               <a:buNone/>
             </a:pPr>
             <a:r>
-              <a:rPr lang="en-US" sz="2200" dirty="0">
+              <a:rPr lang="en-US" sz="1700" dirty="0">
                 <a:solidFill>
                   <a:srgbClr val="101828"/>
                 </a:solidFill>
@@ -3104,22 +3302,110 @@
                 <a:ea typeface="IBM Plex Sans" pitchFamily="34" charset="-122"/>
                 <a:cs typeface="IBM Plex Sans" pitchFamily="34" charset="-120"/>
               </a:rPr>
-              <a:t>Two searches and a judgement call. Tap the star to begin.</a:t>
-            </a:r>
-            <a:endParaRPr lang="en-US" sz="2200" dirty="0"/>
-          </a:p>
-        </p:txBody>
-      </p:sp>
-      <p:sp>
-        <p:nvSpPr>
-          <p:cNvPr id="10" name="Text 8"/>
-          <p:cNvSpPr txBox="1"/>
-          <p:nvPr/>
-        </p:nvSpPr>
-        <p:spPr>
-          <a:xfrm>
-            <a:off x="502920" y="4526280"/>
-            <a:ext cx="11155680" cy="457200"/>
+              <a:t>Unsorted data cannot be stored</a:t>
+            </a:r>
+            <a:endParaRPr lang="en-US" sz="1700" dirty="0"/>
+          </a:p>
+        </p:txBody>
+      </p:sp>
+      <p:sp>
+        <p:nvSpPr>
+          <p:cNvPr id="13" name="Shape 11"/>
+          <p:cNvSpPr/>
+          <p:nvPr/>
+        </p:nvSpPr>
+        <p:spPr>
+          <a:xfrm>
+            <a:off x="502920" y="3017520"/>
+            <a:ext cx="11155680" cy="731520"/>
+          </a:xfrm>
+          <a:prstGeom prst="roundRect">
+            <a:avLst>
+              <a:gd name="adj" fmla="val 15000"/>
+            </a:avLst>
+          </a:prstGeom>
+          <a:solidFill>
+            <a:srgbClr val="FFFFFF"/>
+          </a:solidFill>
+          <a:ln w="15875">
+            <a:solidFill>
+              <a:srgbClr val="D9DEE7"/>
+            </a:solidFill>
+            <a:prstDash val="solid"/>
+          </a:ln>
+        </p:spPr>
+      </p:sp>
+      <p:sp>
+        <p:nvSpPr>
+          <p:cNvPr id="14" name="Shape 12"/>
+          <p:cNvSpPr/>
+          <p:nvPr/>
+        </p:nvSpPr>
+        <p:spPr>
+          <a:xfrm>
+            <a:off x="777240" y="3163824"/>
+            <a:ext cx="438912" cy="438912"/>
+          </a:xfrm>
+          <a:prstGeom prst="roundRect">
+            <a:avLst>
+              <a:gd name="adj" fmla="val 20833"/>
+            </a:avLst>
+          </a:prstGeom>
+          <a:solidFill>
+            <a:srgbClr val="EEF2FB"/>
+          </a:solidFill>
+          <a:ln/>
+        </p:spPr>
+      </p:sp>
+      <p:sp>
+        <p:nvSpPr>
+          <p:cNvPr id="15" name="Text 13"/>
+          <p:cNvSpPr txBox="1"/>
+          <p:nvPr/>
+        </p:nvSpPr>
+        <p:spPr>
+          <a:xfrm>
+            <a:off x="777240" y="3163824"/>
+            <a:ext cx="438912" cy="438912"/>
+          </a:xfrm>
+          <a:prstGeom prst="rect">
+            <a:avLst/>
+          </a:prstGeom>
+          <a:noFill/>
+          <a:ln/>
+        </p:spPr>
+        <p:txBody>
+          <a:bodyPr wrap="square" lIns="0" tIns="0" rIns="0" bIns="0" rtlCol="0" anchor="ctr"/>
+          <a:lstStyle/>
+          <a:p>
+            <a:pPr algn="ctr" indent="0" marL="0">
+              <a:buNone/>
+            </a:pPr>
+            <a:r>
+              <a:rPr lang="en-US" sz="1300" b="1" dirty="0">
+                <a:solidFill>
+                  <a:srgbClr val="2D63FF"/>
+                </a:solidFill>
+                <a:latin typeface="IBM Plex Mono" pitchFamily="34" charset="0"/>
+                <a:ea typeface="IBM Plex Mono" pitchFamily="34" charset="-122"/>
+                <a:cs typeface="IBM Plex Mono" pitchFamily="34" charset="-120"/>
+              </a:rPr>
+              <a:t>B</a:t>
+            </a:r>
+            <a:endParaRPr lang="en-US" sz="1300" dirty="0"/>
+          </a:p>
+        </p:txBody>
+      </p:sp>
+      <p:sp>
+        <p:nvSpPr>
+          <p:cNvPr id="16" name="Text 14"/>
+          <p:cNvSpPr txBox="1"/>
+          <p:nvPr/>
+        </p:nvSpPr>
+        <p:spPr>
+          <a:xfrm>
+            <a:off x="1417320" y="3017520"/>
+            <a:ext cx="10058400" cy="731520"/>
           </a:xfrm>
           <a:prstGeom prst="rect">
             <a:avLst/>
@@ -3132,20 +3418,283 @@
           <a:lstStyle/>
           <a:p>
             <a:pPr indent="0" marL="0">
-              <a:buNone/>
-            </a:pPr>
-            <a:r>
-              <a:rPr lang="en-US" sz="1600" dirty="0">
-                <a:solidFill>
-                  <a:srgbClr val="667085"/>
+              <a:lnSpc>
+                <a:spcPct val="115000"/>
+              </a:lnSpc>
+              <a:buNone/>
+            </a:pPr>
+            <a:r>
+              <a:rPr lang="en-US" sz="1700" dirty="0">
+                <a:solidFill>
+                  <a:srgbClr val="101828"/>
                 </a:solidFill>
                 <a:latin typeface="IBM Plex Sans" pitchFamily="34" charset="0"/>
                 <a:ea typeface="IBM Plex Sans" pitchFamily="34" charset="-122"/>
                 <a:cs typeface="IBM Plex Sans" pitchFamily="34" charset="-120"/>
               </a:rPr>
-              <a:t>Predict on paper first, then look down and test it.</a:t>
-            </a:r>
-            <a:endParaRPr lang="en-US" sz="1600" dirty="0"/>
+              <a:t>Sorting removes duplicates</a:t>
+            </a:r>
+            <a:endParaRPr lang="en-US" sz="1700" dirty="0"/>
+          </a:p>
+        </p:txBody>
+      </p:sp>
+      <p:sp>
+        <p:nvSpPr>
+          <p:cNvPr id="17" name="Shape 15"/>
+          <p:cNvSpPr/>
+          <p:nvPr/>
+        </p:nvSpPr>
+        <p:spPr>
+          <a:xfrm>
+            <a:off x="502920" y="3886200"/>
+            <a:ext cx="11155680" cy="731520"/>
+          </a:xfrm>
+          <a:prstGeom prst="roundRect">
+            <a:avLst>
+              <a:gd name="adj" fmla="val 15000"/>
+            </a:avLst>
+          </a:prstGeom>
+          <a:solidFill>
+            <a:srgbClr val="FFFFFF"/>
+          </a:solidFill>
+          <a:ln w="15875">
+            <a:solidFill>
+              <a:srgbClr val="D9DEE7"/>
+            </a:solidFill>
+            <a:prstDash val="solid"/>
+          </a:ln>
+        </p:spPr>
+      </p:sp>
+      <p:sp>
+        <p:nvSpPr>
+          <p:cNvPr id="18" name="Shape 16"/>
+          <p:cNvSpPr/>
+          <p:nvPr/>
+        </p:nvSpPr>
+        <p:spPr>
+          <a:xfrm>
+            <a:off x="777240" y="4032504"/>
+            <a:ext cx="438912" cy="438912"/>
+          </a:xfrm>
+          <a:prstGeom prst="roundRect">
+            <a:avLst>
+              <a:gd name="adj" fmla="val 20833"/>
+            </a:avLst>
+          </a:prstGeom>
+          <a:solidFill>
+            <a:srgbClr val="EEF2FB"/>
+          </a:solidFill>
+          <a:ln/>
+        </p:spPr>
+      </p:sp>
+      <p:sp>
+        <p:nvSpPr>
+          <p:cNvPr id="19" name="Text 17"/>
+          <p:cNvSpPr txBox="1"/>
+          <p:nvPr/>
+        </p:nvSpPr>
+        <p:spPr>
+          <a:xfrm>
+            <a:off x="777240" y="4032504"/>
+            <a:ext cx="438912" cy="438912"/>
+          </a:xfrm>
+          <a:prstGeom prst="rect">
+            <a:avLst/>
+          </a:prstGeom>
+          <a:noFill/>
+          <a:ln/>
+        </p:spPr>
+        <p:txBody>
+          <a:bodyPr wrap="square" lIns="0" tIns="0" rIns="0" bIns="0" rtlCol="0" anchor="ctr"/>
+          <a:lstStyle/>
+          <a:p>
+            <a:pPr algn="ctr" indent="0" marL="0">
+              <a:buNone/>
+            </a:pPr>
+            <a:r>
+              <a:rPr lang="en-US" sz="1300" b="1" dirty="0">
+                <a:solidFill>
+                  <a:srgbClr val="2D63FF"/>
+                </a:solidFill>
+                <a:latin typeface="IBM Plex Mono" pitchFamily="34" charset="0"/>
+                <a:ea typeface="IBM Plex Mono" pitchFamily="34" charset="-122"/>
+                <a:cs typeface="IBM Plex Mono" pitchFamily="34" charset="-120"/>
+              </a:rPr>
+              <a:t>C</a:t>
+            </a:r>
+            <a:endParaRPr lang="en-US" sz="1300" dirty="0"/>
+          </a:p>
+        </p:txBody>
+      </p:sp>
+      <p:sp>
+        <p:nvSpPr>
+          <p:cNvPr id="20" name="Text 18"/>
+          <p:cNvSpPr txBox="1"/>
+          <p:nvPr/>
+        </p:nvSpPr>
+        <p:spPr>
+          <a:xfrm>
+            <a:off x="1417320" y="3886200"/>
+            <a:ext cx="10058400" cy="731520"/>
+          </a:xfrm>
+          <a:prstGeom prst="rect">
+            <a:avLst/>
+          </a:prstGeom>
+          <a:noFill/>
+          <a:ln/>
+        </p:spPr>
+        <p:txBody>
+          <a:bodyPr wrap="square" lIns="0" tIns="0" rIns="0" bIns="0" rtlCol="0" anchor="ctr"/>
+          <a:lstStyle/>
+          <a:p>
+            <a:pPr indent="0" marL="0">
+              <a:lnSpc>
+                <a:spcPct val="115000"/>
+              </a:lnSpc>
+              <a:buNone/>
+            </a:pPr>
+            <a:r>
+              <a:rPr lang="en-US" sz="1700" dirty="0">
+                <a:solidFill>
+                  <a:srgbClr val="101828"/>
+                </a:solidFill>
+                <a:latin typeface="IBM Plex Sans" pitchFamily="34" charset="0"/>
+                <a:ea typeface="IBM Plex Sans" pitchFamily="34" charset="-122"/>
+                <a:cs typeface="IBM Plex Sans" pitchFamily="34" charset="-120"/>
+              </a:rPr>
+              <a:t>So they can use a much faster search that needs the list in order</a:t>
+            </a:r>
+            <a:endParaRPr lang="en-US" sz="1700" dirty="0"/>
+          </a:p>
+        </p:txBody>
+      </p:sp>
+      <p:sp>
+        <p:nvSpPr>
+          <p:cNvPr id="21" name="Shape 19"/>
+          <p:cNvSpPr/>
+          <p:nvPr/>
+        </p:nvSpPr>
+        <p:spPr>
+          <a:xfrm>
+            <a:off x="502920" y="4754880"/>
+            <a:ext cx="11155680" cy="731520"/>
+          </a:xfrm>
+          <a:prstGeom prst="roundRect">
+            <a:avLst>
+              <a:gd name="adj" fmla="val 15000"/>
+            </a:avLst>
+          </a:prstGeom>
+          <a:solidFill>
+            <a:srgbClr val="FFFFFF"/>
+          </a:solidFill>
+          <a:ln w="15875">
+            <a:solidFill>
+              <a:srgbClr val="D9DEE7"/>
+            </a:solidFill>
+            <a:prstDash val="solid"/>
+          </a:ln>
+        </p:spPr>
+      </p:sp>
+      <p:sp>
+        <p:nvSpPr>
+          <p:cNvPr id="22" name="Shape 20"/>
+          <p:cNvSpPr/>
+          <p:nvPr/>
+        </p:nvSpPr>
+        <p:spPr>
+          <a:xfrm>
+            <a:off x="777240" y="4901184"/>
+            <a:ext cx="438912" cy="438912"/>
+          </a:xfrm>
+          <a:prstGeom prst="roundRect">
+            <a:avLst>
+              <a:gd name="adj" fmla="val 20833"/>
+            </a:avLst>
+          </a:prstGeom>
+          <a:solidFill>
+            <a:srgbClr val="EEF2FB"/>
+          </a:solidFill>
+          <a:ln/>
+        </p:spPr>
+      </p:sp>
+      <p:sp>
+        <p:nvSpPr>
+          <p:cNvPr id="23" name="Text 21"/>
+          <p:cNvSpPr txBox="1"/>
+          <p:nvPr/>
+        </p:nvSpPr>
+        <p:spPr>
+          <a:xfrm>
+            <a:off x="777240" y="4901184"/>
+            <a:ext cx="438912" cy="438912"/>
+          </a:xfrm>
+          <a:prstGeom prst="rect">
+            <a:avLst/>
+          </a:prstGeom>
+          <a:noFill/>
+          <a:ln/>
+        </p:spPr>
+        <p:txBody>
+          <a:bodyPr wrap="square" lIns="0" tIns="0" rIns="0" bIns="0" rtlCol="0" anchor="ctr"/>
+          <a:lstStyle/>
+          <a:p>
+            <a:pPr algn="ctr" indent="0" marL="0">
+              <a:buNone/>
+            </a:pPr>
+            <a:r>
+              <a:rPr lang="en-US" sz="1300" b="1" dirty="0">
+                <a:solidFill>
+                  <a:srgbClr val="2D63FF"/>
+                </a:solidFill>
+                <a:latin typeface="IBM Plex Mono" pitchFamily="34" charset="0"/>
+                <a:ea typeface="IBM Plex Mono" pitchFamily="34" charset="-122"/>
+                <a:cs typeface="IBM Plex Mono" pitchFamily="34" charset="-120"/>
+              </a:rPr>
+              <a:t>D</a:t>
+            </a:r>
+            <a:endParaRPr lang="en-US" sz="1300" dirty="0"/>
+          </a:p>
+        </p:txBody>
+      </p:sp>
+      <p:sp>
+        <p:nvSpPr>
+          <p:cNvPr id="24" name="Text 22"/>
+          <p:cNvSpPr txBox="1"/>
+          <p:nvPr/>
+        </p:nvSpPr>
+        <p:spPr>
+          <a:xfrm>
+            <a:off x="1417320" y="4754880"/>
+            <a:ext cx="10058400" cy="731520"/>
+          </a:xfrm>
+          <a:prstGeom prst="rect">
+            <a:avLst/>
+          </a:prstGeom>
+          <a:noFill/>
+          <a:ln/>
+        </p:spPr>
+        <p:txBody>
+          <a:bodyPr wrap="square" lIns="0" tIns="0" rIns="0" bIns="0" rtlCol="0" anchor="ctr"/>
+          <a:lstStyle/>
+          <a:p>
+            <a:pPr indent="0" marL="0">
+              <a:lnSpc>
+                <a:spcPct val="115000"/>
+              </a:lnSpc>
+              <a:buNone/>
+            </a:pPr>
+            <a:r>
+              <a:rPr lang="en-US" sz="1700" dirty="0">
+                <a:solidFill>
+                  <a:srgbClr val="101828"/>
+                </a:solidFill>
+                <a:latin typeface="IBM Plex Sans" pitchFamily="34" charset="0"/>
+                <a:ea typeface="IBM Plex Sans" pitchFamily="34" charset="-122"/>
+                <a:cs typeface="IBM Plex Sans" pitchFamily="34" charset="-120"/>
+              </a:rPr>
+              <a:t>Sorted data uses less space</a:t>
+            </a:r>
+            <a:endParaRPr lang="en-US" sz="1700" dirty="0"/>
           </a:p>
         </p:txBody>
       </p:sp>
@@ -3281,14 +3830,75 @@
       </p:sp>
       <p:sp>
         <p:nvSpPr>
-          <p:cNvPr id="5" name="Text 3"/>
-          <p:cNvSpPr txBox="1"/>
-          <p:nvPr/>
-        </p:nvSpPr>
-        <p:spPr>
-          <a:xfrm>
-            <a:off x="502920" y="411480"/>
-            <a:ext cx="11155680" cy="777240"/>
+          <p:cNvPr id="5" name="Shape 3"/>
+          <p:cNvSpPr/>
+          <p:nvPr/>
+        </p:nvSpPr>
+        <p:spPr>
+          <a:xfrm>
+            <a:off x="502920" y="438912"/>
+            <a:ext cx="3108960" cy="502920"/>
+          </a:xfrm>
+          <a:prstGeom prst="roundRect">
+            <a:avLst>
+              <a:gd name="adj" fmla="val 18182"/>
+            </a:avLst>
+          </a:prstGeom>
+          <a:solidFill>
+            <a:srgbClr val="F4B942"/>
+          </a:solidFill>
+          <a:ln/>
+        </p:spPr>
+      </p:sp>
+      <p:sp>
+        <p:nvSpPr>
+          <p:cNvPr id="6" name="Text 4"/>
+          <p:cNvSpPr txBox="1"/>
+          <p:nvPr/>
+        </p:nvSpPr>
+        <p:spPr>
+          <a:xfrm>
+            <a:off x="502920" y="438912"/>
+            <a:ext cx="3108960" cy="502920"/>
+          </a:xfrm>
+          <a:prstGeom prst="rect">
+            <a:avLst/>
+          </a:prstGeom>
+          <a:noFill/>
+          <a:ln/>
+        </p:spPr>
+        <p:txBody>
+          <a:bodyPr wrap="square" lIns="0" tIns="0" rIns="0" bIns="0" rtlCol="0" anchor="ctr"/>
+          <a:lstStyle/>
+          <a:p>
+            <a:pPr algn="ctr" indent="0" marL="0">
+              <a:buNone/>
+            </a:pPr>
+            <a:r>
+              <a:rPr lang="en-US" sz="1300" b="1" dirty="0">
+                <a:solidFill>
+                  <a:srgbClr val="101828"/>
+                </a:solidFill>
+                <a:latin typeface="IBM Plex Mono" pitchFamily="34" charset="0"/>
+                <a:ea typeface="IBM Plex Mono" pitchFamily="34" charset="-122"/>
+                <a:cs typeface="IBM Plex Mono" pitchFamily="34" charset="-120"/>
+              </a:rPr>
+              <a:t>★  FINAL CHALLENGE</a:t>
+            </a:r>
+            <a:endParaRPr lang="en-US" sz="1300" dirty="0"/>
+          </a:p>
+        </p:txBody>
+      </p:sp>
+      <p:sp>
+        <p:nvSpPr>
+          <p:cNvPr id="7" name="Text 5"/>
+          <p:cNvSpPr txBox="1"/>
+          <p:nvPr/>
+        </p:nvSpPr>
+        <p:spPr>
+          <a:xfrm>
+            <a:off x="502920" y="1097280"/>
+            <a:ext cx="11155680" cy="731520"/>
           </a:xfrm>
           <a:prstGeom prst="rect">
             <a:avLst/>
@@ -3304,7 +3914,7 @@
               <a:buNone/>
             </a:pPr>
             <a:r>
-              <a:rPr lang="en-US" sz="3200" b="1" dirty="0">
+              <a:rPr lang="en-US" sz="3400" b="1" dirty="0">
                 <a:solidFill>
                   <a:srgbClr val="101828"/>
                 </a:solidFill>
@@ -3312,65 +3922,26 @@
                 <a:ea typeface="IBM Plex Sans" pitchFamily="34" charset="-122"/>
                 <a:cs typeface="IBM Plex Sans" pitchFamily="34" charset="-120"/>
               </a:rPr>
-              <a:t>Worth knowing</a:t>
-            </a:r>
-            <a:endParaRPr lang="en-US" sz="3200" dirty="0"/>
-          </a:p>
-        </p:txBody>
-      </p:sp>
-      <p:sp>
-        <p:nvSpPr>
-          <p:cNvPr id="6" name="Text 4"/>
-          <p:cNvSpPr txBox="1"/>
-          <p:nvPr/>
-        </p:nvSpPr>
-        <p:spPr>
-          <a:xfrm>
-            <a:off x="502920" y="1170432"/>
-            <a:ext cx="11155680" cy="411480"/>
-          </a:xfrm>
-          <a:prstGeom prst="rect">
-            <a:avLst/>
-          </a:prstGeom>
-          <a:noFill/>
-          <a:ln/>
-        </p:spPr>
-        <p:txBody>
-          <a:bodyPr wrap="square" lIns="0" tIns="0" rIns="0" bIns="0" rtlCol="0" anchor="ctr"/>
-          <a:lstStyle/>
-          <a:p>
-            <a:pPr indent="0" marL="0">
-              <a:buNone/>
-            </a:pPr>
-            <a:r>
-              <a:rPr lang="en-US" sz="1500" dirty="0">
-                <a:solidFill>
-                  <a:srgbClr val="667085"/>
-                </a:solidFill>
-                <a:latin typeface="IBM Plex Sans" pitchFamily="34" charset="0"/>
-                <a:ea typeface="IBM Plex Sans" pitchFamily="34" charset="-122"/>
-                <a:cs typeface="IBM Plex Sans" pitchFamily="34" charset="-120"/>
-              </a:rPr>
-              <a:t>The information markers dotted around the room</a:t>
-            </a:r>
-            <a:endParaRPr lang="en-US" sz="1500" dirty="0"/>
-          </a:p>
-        </p:txBody>
-      </p:sp>
-      <p:sp>
-        <p:nvSpPr>
-          <p:cNvPr id="7" name="Shape 5"/>
+              <a:t>Search it</a:t>
+            </a:r>
+            <a:endParaRPr lang="en-US" sz="3400" dirty="0"/>
+          </a:p>
+        </p:txBody>
+      </p:sp>
+      <p:sp>
+        <p:nvSpPr>
+          <p:cNvPr id="8" name="Shape 6"/>
           <p:cNvSpPr/>
           <p:nvPr/>
         </p:nvSpPr>
         <p:spPr>
           <a:xfrm>
-            <a:off x="502920" y="1828800"/>
-            <a:ext cx="5394960" cy="1737360"/>
+            <a:off x="502920" y="2011680"/>
+            <a:ext cx="11155680" cy="2194560"/>
           </a:xfrm>
           <a:prstGeom prst="roundRect">
             <a:avLst>
-              <a:gd name="adj" fmla="val 6316"/>
+              <a:gd name="adj" fmla="val 5000"/>
             </a:avLst>
           </a:prstGeom>
           <a:solidFill>
@@ -3386,14 +3957,14 @@
       </p:sp>
       <p:sp>
         <p:nvSpPr>
-          <p:cNvPr id="8" name="Text 6"/>
-          <p:cNvSpPr txBox="1"/>
-          <p:nvPr/>
-        </p:nvSpPr>
-        <p:spPr>
-          <a:xfrm>
-            <a:off x="822960" y="2011680"/>
-            <a:ext cx="4754880" cy="365760"/>
+          <p:cNvPr id="9" name="Text 7"/>
+          <p:cNvSpPr txBox="1"/>
+          <p:nvPr/>
+        </p:nvSpPr>
+        <p:spPr>
+          <a:xfrm>
+            <a:off x="1005840" y="2331720"/>
+            <a:ext cx="10149840" cy="1554480"/>
           </a:xfrm>
           <a:prstGeom prst="rect">
             <a:avLst/>
@@ -3406,52 +3977,52 @@
           <a:lstStyle/>
           <a:p>
             <a:pPr indent="0" marL="0">
-              <a:buNone/>
-            </a:pPr>
-            <a:r>
-              <a:rPr lang="en-US" sz="1600" b="1" dirty="0">
-                <a:solidFill>
-                  <a:srgbClr val="2D63FF"/>
+              <a:lnSpc>
+                <a:spcPct val="130000"/>
+              </a:lnSpc>
+              <a:buNone/>
+            </a:pPr>
+            <a:r>
+              <a:rPr lang="en-US" sz="2200" dirty="0">
+                <a:solidFill>
+                  <a:srgbClr val="101828"/>
                 </a:solidFill>
                 <a:latin typeface="IBM Plex Sans" pitchFamily="34" charset="0"/>
                 <a:ea typeface="IBM Plex Sans" pitchFamily="34" charset="-122"/>
                 <a:cs typeface="IBM Plex Sans" pitchFamily="34" charset="-120"/>
               </a:rPr>
-              <a:t>Also called sequential</a:t>
-            </a:r>
-            <a:endParaRPr lang="en-US" sz="1600" dirty="0"/>
-          </a:p>
-        </p:txBody>
-      </p:sp>
-      <p:sp>
-        <p:nvSpPr>
-          <p:cNvPr id="9" name="Text 7"/>
-          <p:cNvSpPr txBox="1"/>
-          <p:nvPr/>
-        </p:nvSpPr>
-        <p:spPr>
-          <a:xfrm>
-            <a:off x="822960" y="2395728"/>
-            <a:ext cx="4754880" cy="1005840"/>
-          </a:xfrm>
-          <a:prstGeom prst="rect">
-            <a:avLst/>
-          </a:prstGeom>
-          <a:noFill/>
-          <a:ln/>
-        </p:spPr>
-        <p:txBody>
-          <a:bodyPr wrap="square" lIns="0" tIns="0" rIns="0" bIns="0" rtlCol="0" anchor="t"/>
+              <a:t>Two searches and a judgement call. Tap the star to begin.</a:t>
+            </a:r>
+            <a:endParaRPr lang="en-US" sz="2200" dirty="0"/>
+          </a:p>
+        </p:txBody>
+      </p:sp>
+      <p:sp>
+        <p:nvSpPr>
+          <p:cNvPr id="10" name="Text 8"/>
+          <p:cNvSpPr txBox="1"/>
+          <p:nvPr/>
+        </p:nvSpPr>
+        <p:spPr>
+          <a:xfrm>
+            <a:off x="502920" y="4526280"/>
+            <a:ext cx="11155680" cy="457200"/>
+          </a:xfrm>
+          <a:prstGeom prst="rect">
+            <a:avLst/>
+          </a:prstGeom>
+          <a:noFill/>
+          <a:ln/>
+        </p:spPr>
+        <p:txBody>
+          <a:bodyPr wrap="square" lIns="0" tIns="0" rIns="0" bIns="0" rtlCol="0" anchor="ctr"/>
           <a:lstStyle/>
           <a:p>
             <a:pPr indent="0" marL="0">
-              <a:lnSpc>
-                <a:spcPct val="120000"/>
-              </a:lnSpc>
-              <a:buNone/>
-            </a:pPr>
-            <a:r>
-              <a:rPr lang="en-US" sz="1300" dirty="0">
+              <a:buNone/>
+            </a:pPr>
+            <a:r>
+              <a:rPr lang="en-US" sz="1600" dirty="0">
                 <a:solidFill>
                   <a:srgbClr val="667085"/>
                 </a:solidFill>
@@ -3459,333 +4030,9 @@
                 <a:ea typeface="IBM Plex Sans" pitchFamily="34" charset="-122"/>
                 <a:cs typeface="IBM Plex Sans" pitchFamily="34" charset="-120"/>
               </a:rPr>
-              <a:t>A linear search is sometimes called a sequential search, because it goes through the list in sequence.</a:t>
-            </a:r>
-            <a:endParaRPr lang="en-US" sz="1300" dirty="0"/>
-          </a:p>
-        </p:txBody>
-      </p:sp>
-      <p:sp>
-        <p:nvSpPr>
-          <p:cNvPr id="10" name="Shape 8"/>
-          <p:cNvSpPr/>
-          <p:nvPr/>
-        </p:nvSpPr>
-        <p:spPr>
-          <a:xfrm>
-            <a:off x="6217920" y="1828800"/>
-            <a:ext cx="5394960" cy="1737360"/>
-          </a:xfrm>
-          <a:prstGeom prst="roundRect">
-            <a:avLst>
-              <a:gd name="adj" fmla="val 6316"/>
-            </a:avLst>
-          </a:prstGeom>
-          <a:solidFill>
-            <a:srgbClr val="FFFFFF"/>
-          </a:solidFill>
-          <a:ln w="15875">
-            <a:solidFill>
-              <a:srgbClr val="08A6A6"/>
-            </a:solidFill>
-            <a:prstDash val="solid"/>
-          </a:ln>
-        </p:spPr>
-      </p:sp>
-      <p:sp>
-        <p:nvSpPr>
-          <p:cNvPr id="11" name="Text 9"/>
-          <p:cNvSpPr txBox="1"/>
-          <p:nvPr/>
-        </p:nvSpPr>
-        <p:spPr>
-          <a:xfrm>
-            <a:off x="6537960" y="2011680"/>
-            <a:ext cx="4754880" cy="365760"/>
-          </a:xfrm>
-          <a:prstGeom prst="rect">
-            <a:avLst/>
-          </a:prstGeom>
-          <a:noFill/>
-          <a:ln/>
-        </p:spPr>
-        <p:txBody>
-          <a:bodyPr wrap="square" lIns="0" tIns="0" rIns="0" bIns="0" rtlCol="0" anchor="ctr"/>
-          <a:lstStyle/>
-          <a:p>
-            <a:pPr indent="0" marL="0">
-              <a:buNone/>
-            </a:pPr>
-            <a:r>
-              <a:rPr lang="en-US" sz="1600" b="1" dirty="0">
-                <a:solidFill>
-                  <a:srgbClr val="08A6A6"/>
-                </a:solidFill>
-                <a:latin typeface="IBM Plex Sans" pitchFamily="34" charset="0"/>
-                <a:ea typeface="IBM Plex Sans" pitchFamily="34" charset="-122"/>
-                <a:cs typeface="IBM Plex Sans" pitchFamily="34" charset="-120"/>
-              </a:rPr>
-              <a:t>Sometimes unbeatable</a:t>
+              <a:t>Predict on paper first, then look down and test it.</a:t>
             </a:r>
             <a:endParaRPr lang="en-US" sz="1600" dirty="0"/>
-          </a:p>
-        </p:txBody>
-      </p:sp>
-      <p:sp>
-        <p:nvSpPr>
-          <p:cNvPr id="12" name="Text 10"/>
-          <p:cNvSpPr txBox="1"/>
-          <p:nvPr/>
-        </p:nvSpPr>
-        <p:spPr>
-          <a:xfrm>
-            <a:off x="6537960" y="2395728"/>
-            <a:ext cx="4754880" cy="1005840"/>
-          </a:xfrm>
-          <a:prstGeom prst="rect">
-            <a:avLst/>
-          </a:prstGeom>
-          <a:noFill/>
-          <a:ln/>
-        </p:spPr>
-        <p:txBody>
-          <a:bodyPr wrap="square" lIns="0" tIns="0" rIns="0" bIns="0" rtlCol="0" anchor="t"/>
-          <a:lstStyle/>
-          <a:p>
-            <a:pPr indent="0" marL="0">
-              <a:lnSpc>
-                <a:spcPct val="120000"/>
-              </a:lnSpc>
-              <a:buNone/>
-            </a:pPr>
-            <a:r>
-              <a:rPr lang="en-US" sz="1300" dirty="0">
-                <a:solidFill>
-                  <a:srgbClr val="667085"/>
-                </a:solidFill>
-                <a:latin typeface="IBM Plex Sans" pitchFamily="34" charset="0"/>
-                <a:ea typeface="IBM Plex Sans" pitchFamily="34" charset="-122"/>
-                <a:cs typeface="IBM Plex Sans" pitchFamily="34" charset="-120"/>
-              </a:rPr>
-              <a:t>If the list is unsorted and you search it once, a linear search is the fastest possible: anything else would have to look at every item too.</a:t>
-            </a:r>
-            <a:endParaRPr lang="en-US" sz="1300" dirty="0"/>
-          </a:p>
-        </p:txBody>
-      </p:sp>
-      <p:sp>
-        <p:nvSpPr>
-          <p:cNvPr id="13" name="Shape 11"/>
-          <p:cNvSpPr/>
-          <p:nvPr/>
-        </p:nvSpPr>
-        <p:spPr>
-          <a:xfrm>
-            <a:off x="502920" y="3794760"/>
-            <a:ext cx="5394960" cy="1737360"/>
-          </a:xfrm>
-          <a:prstGeom prst="roundRect">
-            <a:avLst>
-              <a:gd name="adj" fmla="val 6316"/>
-            </a:avLst>
-          </a:prstGeom>
-          <a:solidFill>
-            <a:srgbClr val="FFFFFF"/>
-          </a:solidFill>
-          <a:ln w="15875">
-            <a:solidFill>
-              <a:srgbClr val="2D63FF"/>
-            </a:solidFill>
-            <a:prstDash val="solid"/>
-          </a:ln>
-        </p:spPr>
-      </p:sp>
-      <p:sp>
-        <p:nvSpPr>
-          <p:cNvPr id="14" name="Text 12"/>
-          <p:cNvSpPr txBox="1"/>
-          <p:nvPr/>
-        </p:nvSpPr>
-        <p:spPr>
-          <a:xfrm>
-            <a:off x="822960" y="3977640"/>
-            <a:ext cx="4754880" cy="365760"/>
-          </a:xfrm>
-          <a:prstGeom prst="rect">
-            <a:avLst/>
-          </a:prstGeom>
-          <a:noFill/>
-          <a:ln/>
-        </p:spPr>
-        <p:txBody>
-          <a:bodyPr wrap="square" lIns="0" tIns="0" rIns="0" bIns="0" rtlCol="0" anchor="ctr"/>
-          <a:lstStyle/>
-          <a:p>
-            <a:pPr indent="0" marL="0">
-              <a:buNone/>
-            </a:pPr>
-            <a:r>
-              <a:rPr lang="en-US" sz="1600" b="1" dirty="0">
-                <a:solidFill>
-                  <a:srgbClr val="2D63FF"/>
-                </a:solidFill>
-                <a:latin typeface="IBM Plex Sans" pitchFamily="34" charset="0"/>
-                <a:ea typeface="IBM Plex Sans" pitchFamily="34" charset="-122"/>
-                <a:cs typeface="IBM Plex Sans" pitchFamily="34" charset="-120"/>
-              </a:rPr>
-              <a:t>Your eyes do it</a:t>
-            </a:r>
-            <a:endParaRPr lang="en-US" sz="1600" dirty="0"/>
-          </a:p>
-        </p:txBody>
-      </p:sp>
-      <p:sp>
-        <p:nvSpPr>
-          <p:cNvPr id="15" name="Text 13"/>
-          <p:cNvSpPr txBox="1"/>
-          <p:nvPr/>
-        </p:nvSpPr>
-        <p:spPr>
-          <a:xfrm>
-            <a:off x="822960" y="4361688"/>
-            <a:ext cx="4754880" cy="1005840"/>
-          </a:xfrm>
-          <a:prstGeom prst="rect">
-            <a:avLst/>
-          </a:prstGeom>
-          <a:noFill/>
-          <a:ln/>
-        </p:spPr>
-        <p:txBody>
-          <a:bodyPr wrap="square" lIns="0" tIns="0" rIns="0" bIns="0" rtlCol="0" anchor="t"/>
-          <a:lstStyle/>
-          <a:p>
-            <a:pPr indent="0" marL="0">
-              <a:lnSpc>
-                <a:spcPct val="120000"/>
-              </a:lnSpc>
-              <a:buNone/>
-            </a:pPr>
-            <a:r>
-              <a:rPr lang="en-US" sz="1300" dirty="0">
-                <a:solidFill>
-                  <a:srgbClr val="667085"/>
-                </a:solidFill>
-                <a:latin typeface="IBM Plex Sans" pitchFamily="34" charset="0"/>
-                <a:ea typeface="IBM Plex Sans" pitchFamily="34" charset="-122"/>
-                <a:cs typeface="IBM Plex Sans" pitchFamily="34" charset="-120"/>
-              </a:rPr>
-              <a:t>Scanning a shelf for a particular book is a linear search, which is why bookshops sort their shelves.</a:t>
-            </a:r>
-            <a:endParaRPr lang="en-US" sz="1300" dirty="0"/>
-          </a:p>
-        </p:txBody>
-      </p:sp>
-      <p:sp>
-        <p:nvSpPr>
-          <p:cNvPr id="16" name="Shape 14"/>
-          <p:cNvSpPr/>
-          <p:nvPr/>
-        </p:nvSpPr>
-        <p:spPr>
-          <a:xfrm>
-            <a:off x="6217920" y="3794760"/>
-            <a:ext cx="5394960" cy="1737360"/>
-          </a:xfrm>
-          <a:prstGeom prst="roundRect">
-            <a:avLst>
-              <a:gd name="adj" fmla="val 6316"/>
-            </a:avLst>
-          </a:prstGeom>
-          <a:solidFill>
-            <a:srgbClr val="FFFFFF"/>
-          </a:solidFill>
-          <a:ln w="15875">
-            <a:solidFill>
-              <a:srgbClr val="08A6A6"/>
-            </a:solidFill>
-            <a:prstDash val="solid"/>
-          </a:ln>
-        </p:spPr>
-      </p:sp>
-      <p:sp>
-        <p:nvSpPr>
-          <p:cNvPr id="17" name="Text 15"/>
-          <p:cNvSpPr txBox="1"/>
-          <p:nvPr/>
-        </p:nvSpPr>
-        <p:spPr>
-          <a:xfrm>
-            <a:off x="6537960" y="3977640"/>
-            <a:ext cx="4754880" cy="365760"/>
-          </a:xfrm>
-          <a:prstGeom prst="rect">
-            <a:avLst/>
-          </a:prstGeom>
-          <a:noFill/>
-          <a:ln/>
-        </p:spPr>
-        <p:txBody>
-          <a:bodyPr wrap="square" lIns="0" tIns="0" rIns="0" bIns="0" rtlCol="0" anchor="ctr"/>
-          <a:lstStyle/>
-          <a:p>
-            <a:pPr indent="0" marL="0">
-              <a:buNone/>
-            </a:pPr>
-            <a:r>
-              <a:rPr lang="en-US" sz="1600" b="1" dirty="0">
-                <a:solidFill>
-                  <a:srgbClr val="08A6A6"/>
-                </a:solidFill>
-                <a:latin typeface="IBM Plex Sans" pitchFamily="34" charset="0"/>
-                <a:ea typeface="IBM Plex Sans" pitchFamily="34" charset="-122"/>
-                <a:cs typeface="IBM Plex Sans" pitchFamily="34" charset="-120"/>
-              </a:rPr>
-              <a:t>Early exit</a:t>
-            </a:r>
-            <a:endParaRPr lang="en-US" sz="1600" dirty="0"/>
-          </a:p>
-        </p:txBody>
-      </p:sp>
-      <p:sp>
-        <p:nvSpPr>
-          <p:cNvPr id="18" name="Text 16"/>
-          <p:cNvSpPr txBox="1"/>
-          <p:nvPr/>
-        </p:nvSpPr>
-        <p:spPr>
-          <a:xfrm>
-            <a:off x="6537960" y="4361688"/>
-            <a:ext cx="4754880" cy="1005840"/>
-          </a:xfrm>
-          <a:prstGeom prst="rect">
-            <a:avLst/>
-          </a:prstGeom>
-          <a:noFill/>
-          <a:ln/>
-        </p:spPr>
-        <p:txBody>
-          <a:bodyPr wrap="square" lIns="0" tIns="0" rIns="0" bIns="0" rtlCol="0" anchor="t"/>
-          <a:lstStyle/>
-          <a:p>
-            <a:pPr indent="0" marL="0">
-              <a:lnSpc>
-                <a:spcPct val="120000"/>
-              </a:lnSpc>
-              <a:buNone/>
-            </a:pPr>
-            <a:r>
-              <a:rPr lang="en-US" sz="1300" dirty="0">
-                <a:solidFill>
-                  <a:srgbClr val="667085"/>
-                </a:solidFill>
-                <a:latin typeface="IBM Plex Sans" pitchFamily="34" charset="0"/>
-                <a:ea typeface="IBM Plex Sans" pitchFamily="34" charset="-122"/>
-                <a:cs typeface="IBM Plex Sans" pitchFamily="34" charset="-120"/>
-              </a:rPr>
-              <a:t>A well-written linear search stops the moment it finds a match, which halves the average work.</a:t>
-            </a:r>
-            <a:endParaRPr lang="en-US" sz="1300" dirty="0"/>
           </a:p>
         </p:txBody>
       </p:sp>
@@ -3952,7 +4199,7 @@
                 <a:ea typeface="IBM Plex Sans" pitchFamily="34" charset="-122"/>
                 <a:cs typeface="IBM Plex Sans" pitchFamily="34" charset="-120"/>
               </a:rPr>
-              <a:t>Exam practice</a:t>
+              <a:t>Worth knowing</a:t>
             </a:r>
             <a:endParaRPr lang="en-US" sz="3200" dirty="0"/>
           </a:p>
@@ -3991,7 +4238,7 @@
                 <a:ea typeface="IBM Plex Sans" pitchFamily="34" charset="-122"/>
                 <a:cs typeface="IBM Plex Sans" pitchFamily="34" charset="-120"/>
               </a:rPr>
-              <a:t>Devices away. Answer from memory on the worksheet.</a:t>
+              <a:t>The information markers dotted around the room</a:t>
             </a:r>
             <a:endParaRPr lang="en-US" sz="1500" dirty="0"/>
           </a:p>
@@ -4006,11 +4253,11 @@
         <p:spPr>
           <a:xfrm>
             <a:off x="502920" y="1828800"/>
-            <a:ext cx="11155680" cy="1097280"/>
+            <a:ext cx="5394960" cy="1737360"/>
           </a:xfrm>
           <a:prstGeom prst="roundRect">
             <a:avLst>
-              <a:gd name="adj" fmla="val 10000"/>
+              <a:gd name="adj" fmla="val 6316"/>
             </a:avLst>
           </a:prstGeom>
           <a:solidFill>
@@ -4018,7 +4265,7 @@
           </a:solidFill>
           <a:ln w="15875">
             <a:solidFill>
-              <a:srgbClr val="D9DEE7"/>
+              <a:srgbClr val="2D63FF"/>
             </a:solidFill>
             <a:prstDash val="solid"/>
           </a:ln>
@@ -4032,8 +4279,8 @@
         </p:nvSpPr>
         <p:spPr>
           <a:xfrm>
-            <a:off x="914400" y="1938528"/>
-            <a:ext cx="9418320" cy="877824"/>
+            <a:off x="822960" y="2011680"/>
+            <a:ext cx="4754880" cy="365760"/>
           </a:xfrm>
           <a:prstGeom prst="rect">
             <a:avLst/>
@@ -4046,101 +4293,79 @@
           <a:lstStyle/>
           <a:p>
             <a:pPr indent="0" marL="0">
-              <a:lnSpc>
-                <a:spcPct val="118000"/>
-              </a:lnSpc>
-              <a:buNone/>
-            </a:pPr>
-            <a:r>
-              <a:rPr lang="en-US" sz="1700" dirty="0">
-                <a:solidFill>
-                  <a:srgbClr val="101828"/>
+              <a:buNone/>
+            </a:pPr>
+            <a:r>
+              <a:rPr lang="en-US" sz="1600" b="1" dirty="0">
+                <a:solidFill>
+                  <a:srgbClr val="2D63FF"/>
                 </a:solidFill>
                 <a:latin typeface="IBM Plex Sans" pitchFamily="34" charset="0"/>
                 <a:ea typeface="IBM Plex Sans" pitchFamily="34" charset="-122"/>
                 <a:cs typeface="IBM Plex Sans" pitchFamily="34" charset="-120"/>
               </a:rPr>
-              <a:t>Describe how a linear search works.</a:t>
-            </a:r>
-            <a:endParaRPr lang="en-US" sz="1700" dirty="0"/>
-          </a:p>
-        </p:txBody>
-      </p:sp>
-      <p:sp>
-        <p:nvSpPr>
-          <p:cNvPr id="9" name="Shape 7"/>
+              <a:t>Also called sequential</a:t>
+            </a:r>
+            <a:endParaRPr lang="en-US" sz="1600" dirty="0"/>
+          </a:p>
+        </p:txBody>
+      </p:sp>
+      <p:sp>
+        <p:nvSpPr>
+          <p:cNvPr id="9" name="Text 7"/>
+          <p:cNvSpPr txBox="1"/>
+          <p:nvPr/>
+        </p:nvSpPr>
+        <p:spPr>
+          <a:xfrm>
+            <a:off x="822960" y="2395728"/>
+            <a:ext cx="4754880" cy="1005840"/>
+          </a:xfrm>
+          <a:prstGeom prst="rect">
+            <a:avLst/>
+          </a:prstGeom>
+          <a:noFill/>
+          <a:ln/>
+        </p:spPr>
+        <p:txBody>
+          <a:bodyPr wrap="square" lIns="0" tIns="0" rIns="0" bIns="0" rtlCol="0" anchor="t"/>
+          <a:lstStyle/>
+          <a:p>
+            <a:pPr indent="0" marL="0">
+              <a:lnSpc>
+                <a:spcPct val="120000"/>
+              </a:lnSpc>
+              <a:buNone/>
+            </a:pPr>
+            <a:r>
+              <a:rPr lang="en-US" sz="1300" dirty="0">
+                <a:solidFill>
+                  <a:srgbClr val="667085"/>
+                </a:solidFill>
+                <a:latin typeface="IBM Plex Sans" pitchFamily="34" charset="0"/>
+                <a:ea typeface="IBM Plex Sans" pitchFamily="34" charset="-122"/>
+                <a:cs typeface="IBM Plex Sans" pitchFamily="34" charset="-120"/>
+              </a:rPr>
+              <a:t>A linear search is sometimes called a sequential search, because it goes through the list in sequence.</a:t>
+            </a:r>
+            <a:endParaRPr lang="en-US" sz="1300" dirty="0"/>
+          </a:p>
+        </p:txBody>
+      </p:sp>
+      <p:sp>
+        <p:nvSpPr>
+          <p:cNvPr id="10" name="Shape 8"/>
           <p:cNvSpPr/>
           <p:nvPr/>
         </p:nvSpPr>
         <p:spPr>
           <a:xfrm>
-            <a:off x="10515600" y="2130552"/>
-            <a:ext cx="868680" cy="493776"/>
+            <a:off x="6217920" y="1828800"/>
+            <a:ext cx="5394960" cy="1737360"/>
           </a:xfrm>
           <a:prstGeom prst="roundRect">
             <a:avLst>
-              <a:gd name="adj" fmla="val 18519"/>
-            </a:avLst>
-          </a:prstGeom>
-          <a:solidFill>
-            <a:srgbClr val="EEF2FB"/>
-          </a:solidFill>
-          <a:ln/>
-        </p:spPr>
-      </p:sp>
-      <p:sp>
-        <p:nvSpPr>
-          <p:cNvPr id="10" name="Text 8"/>
-          <p:cNvSpPr txBox="1"/>
-          <p:nvPr/>
-        </p:nvSpPr>
-        <p:spPr>
-          <a:xfrm>
-            <a:off x="10515600" y="2130552"/>
-            <a:ext cx="868680" cy="493776"/>
-          </a:xfrm>
-          <a:prstGeom prst="rect">
-            <a:avLst/>
-          </a:prstGeom>
-          <a:noFill/>
-          <a:ln/>
-        </p:spPr>
-        <p:txBody>
-          <a:bodyPr wrap="square" lIns="0" tIns="0" rIns="0" bIns="0" rtlCol="0" anchor="ctr"/>
-          <a:lstStyle/>
-          <a:p>
-            <a:pPr algn="ctr" indent="0" marL="0">
-              <a:buNone/>
-            </a:pPr>
-            <a:r>
-              <a:rPr lang="en-US" sz="1500" b="1" dirty="0">
-                <a:solidFill>
-                  <a:srgbClr val="2D63FF"/>
-                </a:solidFill>
-                <a:latin typeface="IBM Plex Mono" pitchFamily="34" charset="0"/>
-                <a:ea typeface="IBM Plex Mono" pitchFamily="34" charset="-122"/>
-                <a:cs typeface="IBM Plex Mono" pitchFamily="34" charset="-120"/>
-              </a:rPr>
-              <a:t>[3]</a:t>
-            </a:r>
-            <a:endParaRPr lang="en-US" sz="1500" dirty="0"/>
-          </a:p>
-        </p:txBody>
-      </p:sp>
-      <p:sp>
-        <p:nvSpPr>
-          <p:cNvPr id="11" name="Shape 9"/>
-          <p:cNvSpPr/>
-          <p:nvPr/>
-        </p:nvSpPr>
-        <p:spPr>
-          <a:xfrm>
-            <a:off x="502920" y="3127248"/>
-            <a:ext cx="11155680" cy="1097280"/>
-          </a:xfrm>
-          <a:prstGeom prst="roundRect">
-            <a:avLst>
-              <a:gd name="adj" fmla="val 10000"/>
+              <a:gd name="adj" fmla="val 6316"/>
             </a:avLst>
           </a:prstGeom>
           <a:solidFill>
@@ -4148,7 +4373,7 @@
           </a:solidFill>
           <a:ln w="15875">
             <a:solidFill>
-              <a:srgbClr val="D9DEE7"/>
+              <a:srgbClr val="08A6A6"/>
             </a:solidFill>
             <a:prstDash val="solid"/>
           </a:ln>
@@ -4156,14 +4381,14 @@
       </p:sp>
       <p:sp>
         <p:nvSpPr>
-          <p:cNvPr id="12" name="Text 10"/>
-          <p:cNvSpPr txBox="1"/>
-          <p:nvPr/>
-        </p:nvSpPr>
-        <p:spPr>
-          <a:xfrm>
-            <a:off x="914400" y="3236976"/>
-            <a:ext cx="9418320" cy="877824"/>
+          <p:cNvPr id="11" name="Text 9"/>
+          <p:cNvSpPr txBox="1"/>
+          <p:nvPr/>
+        </p:nvSpPr>
+        <p:spPr>
+          <a:xfrm>
+            <a:off x="6537960" y="2011680"/>
+            <a:ext cx="4754880" cy="365760"/>
           </a:xfrm>
           <a:prstGeom prst="rect">
             <a:avLst/>
@@ -4176,23 +4401,62 @@
           <a:lstStyle/>
           <a:p>
             <a:pPr indent="0" marL="0">
-              <a:lnSpc>
-                <a:spcPct val="118000"/>
-              </a:lnSpc>
-              <a:buNone/>
-            </a:pPr>
-            <a:r>
-              <a:rPr lang="en-US" sz="1700" dirty="0">
-                <a:solidFill>
-                  <a:srgbClr val="101828"/>
+              <a:buNone/>
+            </a:pPr>
+            <a:r>
+              <a:rPr lang="en-US" sz="1600" b="1" dirty="0">
+                <a:solidFill>
+                  <a:srgbClr val="08A6A6"/>
                 </a:solidFill>
                 <a:latin typeface="IBM Plex Sans" pitchFamily="34" charset="0"/>
                 <a:ea typeface="IBM Plex Sans" pitchFamily="34" charset="-122"/>
                 <a:cs typeface="IBM Plex Sans" pitchFamily="34" charset="-120"/>
               </a:rPr>
-              <a:t>State one advantage of a linear search over a binary search.</a:t>
-            </a:r>
-            <a:endParaRPr lang="en-US" sz="1700" dirty="0"/>
+              <a:t>Sometimes unbeatable</a:t>
+            </a:r>
+            <a:endParaRPr lang="en-US" sz="1600" dirty="0"/>
+          </a:p>
+        </p:txBody>
+      </p:sp>
+      <p:sp>
+        <p:nvSpPr>
+          <p:cNvPr id="12" name="Text 10"/>
+          <p:cNvSpPr txBox="1"/>
+          <p:nvPr/>
+        </p:nvSpPr>
+        <p:spPr>
+          <a:xfrm>
+            <a:off x="6537960" y="2395728"/>
+            <a:ext cx="4754880" cy="1005840"/>
+          </a:xfrm>
+          <a:prstGeom prst="rect">
+            <a:avLst/>
+          </a:prstGeom>
+          <a:noFill/>
+          <a:ln/>
+        </p:spPr>
+        <p:txBody>
+          <a:bodyPr wrap="square" lIns="0" tIns="0" rIns="0" bIns="0" rtlCol="0" anchor="t"/>
+          <a:lstStyle/>
+          <a:p>
+            <a:pPr indent="0" marL="0">
+              <a:lnSpc>
+                <a:spcPct val="120000"/>
+              </a:lnSpc>
+              <a:buNone/>
+            </a:pPr>
+            <a:r>
+              <a:rPr lang="en-US" sz="1300" dirty="0">
+                <a:solidFill>
+                  <a:srgbClr val="667085"/>
+                </a:solidFill>
+                <a:latin typeface="IBM Plex Sans" pitchFamily="34" charset="0"/>
+                <a:ea typeface="IBM Plex Sans" pitchFamily="34" charset="-122"/>
+                <a:cs typeface="IBM Plex Sans" pitchFamily="34" charset="-120"/>
+              </a:rPr>
+              <a:t>If the list is unsorted and you search it once, a linear search is the fastest possible: anything else would have to look at every item too.</a:t>
+            </a:r>
+            <a:endParaRPr lang="en-US" sz="1300" dirty="0"/>
           </a:p>
         </p:txBody>
       </p:sp>
@@ -4204,73 +4468,12 @@
         </p:nvSpPr>
         <p:spPr>
           <a:xfrm>
-            <a:off x="10515600" y="3429000"/>
-            <a:ext cx="868680" cy="493776"/>
+            <a:off x="502920" y="3794760"/>
+            <a:ext cx="5394960" cy="1737360"/>
           </a:xfrm>
           <a:prstGeom prst="roundRect">
             <a:avLst>
-              <a:gd name="adj" fmla="val 18519"/>
-            </a:avLst>
-          </a:prstGeom>
-          <a:solidFill>
-            <a:srgbClr val="EEF2FB"/>
-          </a:solidFill>
-          <a:ln/>
-        </p:spPr>
-      </p:sp>
-      <p:sp>
-        <p:nvSpPr>
-          <p:cNvPr id="14" name="Text 12"/>
-          <p:cNvSpPr txBox="1"/>
-          <p:nvPr/>
-        </p:nvSpPr>
-        <p:spPr>
-          <a:xfrm>
-            <a:off x="10515600" y="3429000"/>
-            <a:ext cx="868680" cy="493776"/>
-          </a:xfrm>
-          <a:prstGeom prst="rect">
-            <a:avLst/>
-          </a:prstGeom>
-          <a:noFill/>
-          <a:ln/>
-        </p:spPr>
-        <p:txBody>
-          <a:bodyPr wrap="square" lIns="0" tIns="0" rIns="0" bIns="0" rtlCol="0" anchor="ctr"/>
-          <a:lstStyle/>
-          <a:p>
-            <a:pPr algn="ctr" indent="0" marL="0">
-              <a:buNone/>
-            </a:pPr>
-            <a:r>
-              <a:rPr lang="en-US" sz="1500" b="1" dirty="0">
-                <a:solidFill>
-                  <a:srgbClr val="2D63FF"/>
-                </a:solidFill>
-                <a:latin typeface="IBM Plex Mono" pitchFamily="34" charset="0"/>
-                <a:ea typeface="IBM Plex Mono" pitchFamily="34" charset="-122"/>
-                <a:cs typeface="IBM Plex Mono" pitchFamily="34" charset="-120"/>
-              </a:rPr>
-              <a:t>[1]</a:t>
-            </a:r>
-            <a:endParaRPr lang="en-US" sz="1500" dirty="0"/>
-          </a:p>
-        </p:txBody>
-      </p:sp>
-      <p:sp>
-        <p:nvSpPr>
-          <p:cNvPr id="15" name="Shape 13"/>
-          <p:cNvSpPr/>
-          <p:nvPr/>
-        </p:nvSpPr>
-        <p:spPr>
-          <a:xfrm>
-            <a:off x="502920" y="4425696"/>
-            <a:ext cx="11155680" cy="1097280"/>
-          </a:xfrm>
-          <a:prstGeom prst="roundRect">
-            <a:avLst>
-              <a:gd name="adj" fmla="val 10000"/>
+              <a:gd name="adj" fmla="val 6316"/>
             </a:avLst>
           </a:prstGeom>
           <a:solidFill>
@@ -4278,7 +4481,7 @@
           </a:solidFill>
           <a:ln w="15875">
             <a:solidFill>
-              <a:srgbClr val="D9DEE7"/>
+              <a:srgbClr val="2D63FF"/>
             </a:solidFill>
             <a:prstDash val="solid"/>
           </a:ln>
@@ -4286,14 +4489,14 @@
       </p:sp>
       <p:sp>
         <p:nvSpPr>
-          <p:cNvPr id="16" name="Text 14"/>
-          <p:cNvSpPr txBox="1"/>
-          <p:nvPr/>
-        </p:nvSpPr>
-        <p:spPr>
-          <a:xfrm>
-            <a:off x="914400" y="4535424"/>
-            <a:ext cx="9418320" cy="877824"/>
+          <p:cNvPr id="14" name="Text 12"/>
+          <p:cNvSpPr txBox="1"/>
+          <p:nvPr/>
+        </p:nvSpPr>
+        <p:spPr>
+          <a:xfrm>
+            <a:off x="822960" y="3977640"/>
+            <a:ext cx="4754880" cy="365760"/>
           </a:xfrm>
           <a:prstGeom prst="rect">
             <a:avLst/>
@@ -4306,47 +4509,130 @@
           <a:lstStyle/>
           <a:p>
             <a:pPr indent="0" marL="0">
-              <a:lnSpc>
-                <a:spcPct val="118000"/>
-              </a:lnSpc>
-              <a:buNone/>
-            </a:pPr>
-            <a:r>
-              <a:rPr lang="en-US" sz="1700" dirty="0">
-                <a:solidFill>
-                  <a:srgbClr val="101828"/>
+              <a:buNone/>
+            </a:pPr>
+            <a:r>
+              <a:rPr lang="en-US" sz="1600" b="1" dirty="0">
+                <a:solidFill>
+                  <a:srgbClr val="2D63FF"/>
                 </a:solidFill>
                 <a:latin typeface="IBM Plex Sans" pitchFamily="34" charset="0"/>
                 <a:ea typeface="IBM Plex Sans" pitchFamily="34" charset="-122"/>
                 <a:cs typeface="IBM Plex Sans" pitchFamily="34" charset="-120"/>
               </a:rPr>
-              <a:t>A list contains 2,000 unsorted items. Explain why a linear search may take a long time, and state the maximum number of comparisons needed.</a:t>
-            </a:r>
-            <a:endParaRPr lang="en-US" sz="1700" dirty="0"/>
-          </a:p>
-        </p:txBody>
-      </p:sp>
-      <p:sp>
-        <p:nvSpPr>
-          <p:cNvPr id="17" name="Shape 15"/>
+              <a:t>Your eyes do it</a:t>
+            </a:r>
+            <a:endParaRPr lang="en-US" sz="1600" dirty="0"/>
+          </a:p>
+        </p:txBody>
+      </p:sp>
+      <p:sp>
+        <p:nvSpPr>
+          <p:cNvPr id="15" name="Text 13"/>
+          <p:cNvSpPr txBox="1"/>
+          <p:nvPr/>
+        </p:nvSpPr>
+        <p:spPr>
+          <a:xfrm>
+            <a:off x="822960" y="4361688"/>
+            <a:ext cx="4754880" cy="1005840"/>
+          </a:xfrm>
+          <a:prstGeom prst="rect">
+            <a:avLst/>
+          </a:prstGeom>
+          <a:noFill/>
+          <a:ln/>
+        </p:spPr>
+        <p:txBody>
+          <a:bodyPr wrap="square" lIns="0" tIns="0" rIns="0" bIns="0" rtlCol="0" anchor="t"/>
+          <a:lstStyle/>
+          <a:p>
+            <a:pPr indent="0" marL="0">
+              <a:lnSpc>
+                <a:spcPct val="120000"/>
+              </a:lnSpc>
+              <a:buNone/>
+            </a:pPr>
+            <a:r>
+              <a:rPr lang="en-US" sz="1300" dirty="0">
+                <a:solidFill>
+                  <a:srgbClr val="667085"/>
+                </a:solidFill>
+                <a:latin typeface="IBM Plex Sans" pitchFamily="34" charset="0"/>
+                <a:ea typeface="IBM Plex Sans" pitchFamily="34" charset="-122"/>
+                <a:cs typeface="IBM Plex Sans" pitchFamily="34" charset="-120"/>
+              </a:rPr>
+              <a:t>Scanning a shelf for a particular book is a linear search, which is why bookshops sort their shelves.</a:t>
+            </a:r>
+            <a:endParaRPr lang="en-US" sz="1300" dirty="0"/>
+          </a:p>
+        </p:txBody>
+      </p:sp>
+      <p:sp>
+        <p:nvSpPr>
+          <p:cNvPr id="16" name="Shape 14"/>
           <p:cNvSpPr/>
           <p:nvPr/>
         </p:nvSpPr>
         <p:spPr>
           <a:xfrm>
-            <a:off x="10515600" y="4727448"/>
-            <a:ext cx="868680" cy="493776"/>
+            <a:off x="6217920" y="3794760"/>
+            <a:ext cx="5394960" cy="1737360"/>
           </a:xfrm>
           <a:prstGeom prst="roundRect">
             <a:avLst>
-              <a:gd name="adj" fmla="val 18519"/>
+              <a:gd name="adj" fmla="val 6316"/>
             </a:avLst>
           </a:prstGeom>
           <a:solidFill>
-            <a:srgbClr val="EEF2FB"/>
+            <a:srgbClr val="FFFFFF"/>
           </a:solidFill>
-          <a:ln/>
-        </p:spPr>
+          <a:ln w="15875">
+            <a:solidFill>
+              <a:srgbClr val="08A6A6"/>
+            </a:solidFill>
+            <a:prstDash val="solid"/>
+          </a:ln>
+        </p:spPr>
+      </p:sp>
+      <p:sp>
+        <p:nvSpPr>
+          <p:cNvPr id="17" name="Text 15"/>
+          <p:cNvSpPr txBox="1"/>
+          <p:nvPr/>
+        </p:nvSpPr>
+        <p:spPr>
+          <a:xfrm>
+            <a:off x="6537960" y="3977640"/>
+            <a:ext cx="4754880" cy="365760"/>
+          </a:xfrm>
+          <a:prstGeom prst="rect">
+            <a:avLst/>
+          </a:prstGeom>
+          <a:noFill/>
+          <a:ln/>
+        </p:spPr>
+        <p:txBody>
+          <a:bodyPr wrap="square" lIns="0" tIns="0" rIns="0" bIns="0" rtlCol="0" anchor="ctr"/>
+          <a:lstStyle/>
+          <a:p>
+            <a:pPr indent="0" marL="0">
+              <a:buNone/>
+            </a:pPr>
+            <a:r>
+              <a:rPr lang="en-US" sz="1600" b="1" dirty="0">
+                <a:solidFill>
+                  <a:srgbClr val="08A6A6"/>
+                </a:solidFill>
+                <a:latin typeface="IBM Plex Sans" pitchFamily="34" charset="0"/>
+                <a:ea typeface="IBM Plex Sans" pitchFamily="34" charset="-122"/>
+                <a:cs typeface="IBM Plex Sans" pitchFamily="34" charset="-120"/>
+              </a:rPr>
+              <a:t>Early exit</a:t>
+            </a:r>
+            <a:endParaRPr lang="en-US" sz="1600" dirty="0"/>
+          </a:p>
+        </p:txBody>
       </p:sp>
       <p:sp>
         <p:nvSpPr>
@@ -4356,34 +4642,37 @@
         </p:nvSpPr>
         <p:spPr>
           <a:xfrm>
-            <a:off x="10515600" y="4727448"/>
-            <a:ext cx="868680" cy="493776"/>
-          </a:xfrm>
-          <a:prstGeom prst="rect">
-            <a:avLst/>
-          </a:prstGeom>
-          <a:noFill/>
-          <a:ln/>
-        </p:spPr>
-        <p:txBody>
-          <a:bodyPr wrap="square" lIns="0" tIns="0" rIns="0" bIns="0" rtlCol="0" anchor="ctr"/>
-          <a:lstStyle/>
-          <a:p>
-            <a:pPr algn="ctr" indent="0" marL="0">
-              <a:buNone/>
-            </a:pPr>
-            <a:r>
-              <a:rPr lang="en-US" sz="1500" b="1" dirty="0">
-                <a:solidFill>
-                  <a:srgbClr val="2D63FF"/>
-                </a:solidFill>
-                <a:latin typeface="IBM Plex Mono" pitchFamily="34" charset="0"/>
-                <a:ea typeface="IBM Plex Mono" pitchFamily="34" charset="-122"/>
-                <a:cs typeface="IBM Plex Mono" pitchFamily="34" charset="-120"/>
-              </a:rPr>
-              <a:t>[4]</a:t>
-            </a:r>
-            <a:endParaRPr lang="en-US" sz="1500" dirty="0"/>
+            <a:off x="6537960" y="4361688"/>
+            <a:ext cx="4754880" cy="1005840"/>
+          </a:xfrm>
+          <a:prstGeom prst="rect">
+            <a:avLst/>
+          </a:prstGeom>
+          <a:noFill/>
+          <a:ln/>
+        </p:spPr>
+        <p:txBody>
+          <a:bodyPr wrap="square" lIns="0" tIns="0" rIns="0" bIns="0" rtlCol="0" anchor="t"/>
+          <a:lstStyle/>
+          <a:p>
+            <a:pPr indent="0" marL="0">
+              <a:lnSpc>
+                <a:spcPct val="120000"/>
+              </a:lnSpc>
+              <a:buNone/>
+            </a:pPr>
+            <a:r>
+              <a:rPr lang="en-US" sz="1300" dirty="0">
+                <a:solidFill>
+                  <a:srgbClr val="667085"/>
+                </a:solidFill>
+                <a:latin typeface="IBM Plex Sans" pitchFamily="34" charset="0"/>
+                <a:ea typeface="IBM Plex Sans" pitchFamily="34" charset="-122"/>
+                <a:cs typeface="IBM Plex Sans" pitchFamily="34" charset="-120"/>
+              </a:rPr>
+              <a:t>A well-written linear search stops the moment it finds a match, which halves the average work.</a:t>
+            </a:r>
+            <a:endParaRPr lang="en-US" sz="1300" dirty="0"/>
           </a:p>
         </p:txBody>
       </p:sp>
@@ -4398,6 +4687,604 @@
 <file path=ppt/slides/slide14.xml><?xml version="1.0" encoding="utf-8"?>
 <p:sld xmlns:a="http://schemas.openxmlformats.org/drawingml/2006/main" xmlns:r="http://schemas.openxmlformats.org/officeDocument/2006/relationships" xmlns:p="http://schemas.openxmlformats.org/presentationml/2006/main">
   <p:cSld name="Slide 14">
+    <p:bg>
+      <p:bgPr>
+        <a:solidFill>
+          <a:srgbClr val="F7F7F4"/>
+        </a:solidFill>
+      </p:bgPr>
+    </p:bg>
+    <p:spTree>
+      <p:nvGrpSpPr>
+        <p:cNvPr id="1" name=""/>
+        <p:cNvGrpSpPr/>
+        <p:nvPr/>
+      </p:nvGrpSpPr>
+      <p:grpSpPr>
+        <a:xfrm>
+          <a:off x="0" y="0"/>
+          <a:ext cx="0" cy="0"/>
+          <a:chOff x="0" y="0"/>
+          <a:chExt cx="0" cy="0"/>
+        </a:xfrm>
+      </p:grpSpPr>
+      <p:sp>
+        <p:nvSpPr>
+          <p:cNvPr id="2" name="Shape 0"/>
+          <p:cNvSpPr/>
+          <p:nvPr/>
+        </p:nvSpPr>
+        <p:spPr>
+          <a:xfrm>
+            <a:off x="0" y="0"/>
+            <a:ext cx="12188952" cy="82296"/>
+          </a:xfrm>
+          <a:prstGeom prst="rect">
+            <a:avLst/>
+          </a:prstGeom>
+          <a:solidFill>
+            <a:srgbClr val="2D63FF"/>
+          </a:solidFill>
+          <a:ln/>
+        </p:spPr>
+      </p:sp>
+      <p:sp>
+        <p:nvSpPr>
+          <p:cNvPr id="3" name="Text 1"/>
+          <p:cNvSpPr txBox="1"/>
+          <p:nvPr/>
+        </p:nvSpPr>
+        <p:spPr>
+          <a:xfrm>
+            <a:off x="502920" y="6236208"/>
+            <a:ext cx="7772400" cy="365760"/>
+          </a:xfrm>
+          <a:prstGeom prst="rect">
+            <a:avLst/>
+          </a:prstGeom>
+          <a:noFill/>
+          <a:ln/>
+        </p:spPr>
+        <p:txBody>
+          <a:bodyPr wrap="square" lIns="0" tIns="0" rIns="0" bIns="0" rtlCol="0" anchor="ctr"/>
+          <a:lstStyle/>
+          <a:p>
+            <a:pPr indent="0" marL="0">
+              <a:buNone/>
+            </a:pPr>
+            <a:r>
+              <a:rPr lang="en-US" sz="1100" dirty="0">
+                <a:solidFill>
+                  <a:srgbClr val="667085"/>
+                </a:solidFill>
+                <a:latin typeface="IBM Plex Mono" pitchFamily="34" charset="0"/>
+                <a:ea typeface="IBM Plex Mono" pitchFamily="34" charset="-122"/>
+                <a:cs typeface="IBM Plex Mono" pitchFamily="34" charset="-120"/>
+              </a:rPr>
+              <a:t>2.1 Algorithms  |  Lesson 6</a:t>
+            </a:r>
+            <a:endParaRPr lang="en-US" sz="1100" dirty="0"/>
+          </a:p>
+        </p:txBody>
+      </p:sp>
+      <p:sp>
+        <p:nvSpPr>
+          <p:cNvPr id="4" name="Text 2"/>
+          <p:cNvSpPr txBox="1"/>
+          <p:nvPr/>
+        </p:nvSpPr>
+        <p:spPr>
+          <a:xfrm>
+            <a:off x="9326880" y="6236208"/>
+            <a:ext cx="2377440" cy="365760"/>
+          </a:xfrm>
+          <a:prstGeom prst="rect">
+            <a:avLst/>
+          </a:prstGeom>
+          <a:noFill/>
+          <a:ln/>
+        </p:spPr>
+        <p:txBody>
+          <a:bodyPr wrap="square" lIns="0" tIns="0" rIns="0" bIns="0" rtlCol="0" anchor="ctr"/>
+          <a:lstStyle/>
+          <a:p>
+            <a:pPr algn="r" indent="0" marL="0">
+              <a:buNone/>
+            </a:pPr>
+            <a:r>
+              <a:rPr lang="en-US" sz="1100" dirty="0">
+                <a:solidFill>
+                  <a:srgbClr val="667085"/>
+                </a:solidFill>
+                <a:latin typeface="IBM Plex Mono" pitchFamily="34" charset="0"/>
+                <a:ea typeface="IBM Plex Mono" pitchFamily="34" charset="-122"/>
+                <a:cs typeface="IBM Plex Mono" pitchFamily="34" charset="-120"/>
+              </a:rPr>
+              <a:t>Revise 360</a:t>
+            </a:r>
+            <a:endParaRPr lang="en-US" sz="1100" dirty="0"/>
+          </a:p>
+        </p:txBody>
+      </p:sp>
+      <p:sp>
+        <p:nvSpPr>
+          <p:cNvPr id="5" name="Text 3"/>
+          <p:cNvSpPr txBox="1"/>
+          <p:nvPr/>
+        </p:nvSpPr>
+        <p:spPr>
+          <a:xfrm>
+            <a:off x="502920" y="411480"/>
+            <a:ext cx="11155680" cy="777240"/>
+          </a:xfrm>
+          <a:prstGeom prst="rect">
+            <a:avLst/>
+          </a:prstGeom>
+          <a:noFill/>
+          <a:ln/>
+        </p:spPr>
+        <p:txBody>
+          <a:bodyPr wrap="square" lIns="0" tIns="0" rIns="0" bIns="0" rtlCol="0" anchor="ctr"/>
+          <a:lstStyle/>
+          <a:p>
+            <a:pPr indent="0" marL="0">
+              <a:buNone/>
+            </a:pPr>
+            <a:r>
+              <a:rPr lang="en-US" sz="3200" b="1" dirty="0">
+                <a:solidFill>
+                  <a:srgbClr val="101828"/>
+                </a:solidFill>
+                <a:latin typeface="IBM Plex Sans" pitchFamily="34" charset="0"/>
+                <a:ea typeface="IBM Plex Sans" pitchFamily="34" charset="-122"/>
+                <a:cs typeface="IBM Plex Sans" pitchFamily="34" charset="-120"/>
+              </a:rPr>
+              <a:t>Exam practice</a:t>
+            </a:r>
+            <a:endParaRPr lang="en-US" sz="3200" dirty="0"/>
+          </a:p>
+        </p:txBody>
+      </p:sp>
+      <p:sp>
+        <p:nvSpPr>
+          <p:cNvPr id="6" name="Text 4"/>
+          <p:cNvSpPr txBox="1"/>
+          <p:nvPr/>
+        </p:nvSpPr>
+        <p:spPr>
+          <a:xfrm>
+            <a:off x="502920" y="1170432"/>
+            <a:ext cx="11155680" cy="411480"/>
+          </a:xfrm>
+          <a:prstGeom prst="rect">
+            <a:avLst/>
+          </a:prstGeom>
+          <a:noFill/>
+          <a:ln/>
+        </p:spPr>
+        <p:txBody>
+          <a:bodyPr wrap="square" lIns="0" tIns="0" rIns="0" bIns="0" rtlCol="0" anchor="ctr"/>
+          <a:lstStyle/>
+          <a:p>
+            <a:pPr indent="0" marL="0">
+              <a:buNone/>
+            </a:pPr>
+            <a:r>
+              <a:rPr lang="en-US" sz="1500" dirty="0">
+                <a:solidFill>
+                  <a:srgbClr val="667085"/>
+                </a:solidFill>
+                <a:latin typeface="IBM Plex Sans" pitchFamily="34" charset="0"/>
+                <a:ea typeface="IBM Plex Sans" pitchFamily="34" charset="-122"/>
+                <a:cs typeface="IBM Plex Sans" pitchFamily="34" charset="-120"/>
+              </a:rPr>
+              <a:t>Devices away. Answer from memory on the worksheet.</a:t>
+            </a:r>
+            <a:endParaRPr lang="en-US" sz="1500" dirty="0"/>
+          </a:p>
+        </p:txBody>
+      </p:sp>
+      <p:sp>
+        <p:nvSpPr>
+          <p:cNvPr id="7" name="Shape 5"/>
+          <p:cNvSpPr/>
+          <p:nvPr/>
+        </p:nvSpPr>
+        <p:spPr>
+          <a:xfrm>
+            <a:off x="502920" y="1828800"/>
+            <a:ext cx="11155680" cy="1097280"/>
+          </a:xfrm>
+          <a:prstGeom prst="roundRect">
+            <a:avLst>
+              <a:gd name="adj" fmla="val 10000"/>
+            </a:avLst>
+          </a:prstGeom>
+          <a:solidFill>
+            <a:srgbClr val="FFFFFF"/>
+          </a:solidFill>
+          <a:ln w="15875">
+            <a:solidFill>
+              <a:srgbClr val="D9DEE7"/>
+            </a:solidFill>
+            <a:prstDash val="solid"/>
+          </a:ln>
+        </p:spPr>
+      </p:sp>
+      <p:sp>
+        <p:nvSpPr>
+          <p:cNvPr id="8" name="Text 6"/>
+          <p:cNvSpPr txBox="1"/>
+          <p:nvPr/>
+        </p:nvSpPr>
+        <p:spPr>
+          <a:xfrm>
+            <a:off x="914400" y="1938528"/>
+            <a:ext cx="9418320" cy="877824"/>
+          </a:xfrm>
+          <a:prstGeom prst="rect">
+            <a:avLst/>
+          </a:prstGeom>
+          <a:noFill/>
+          <a:ln/>
+        </p:spPr>
+        <p:txBody>
+          <a:bodyPr wrap="square" lIns="0" tIns="0" rIns="0" bIns="0" rtlCol="0" anchor="ctr"/>
+          <a:lstStyle/>
+          <a:p>
+            <a:pPr indent="0" marL="0">
+              <a:lnSpc>
+                <a:spcPct val="118000"/>
+              </a:lnSpc>
+              <a:buNone/>
+            </a:pPr>
+            <a:r>
+              <a:rPr lang="en-US" sz="1700" dirty="0">
+                <a:solidFill>
+                  <a:srgbClr val="101828"/>
+                </a:solidFill>
+                <a:latin typeface="IBM Plex Sans" pitchFamily="34" charset="0"/>
+                <a:ea typeface="IBM Plex Sans" pitchFamily="34" charset="-122"/>
+                <a:cs typeface="IBM Plex Sans" pitchFamily="34" charset="-120"/>
+              </a:rPr>
+              <a:t>Describe how a linear search works.</a:t>
+            </a:r>
+            <a:endParaRPr lang="en-US" sz="1700" dirty="0"/>
+          </a:p>
+        </p:txBody>
+      </p:sp>
+      <p:sp>
+        <p:nvSpPr>
+          <p:cNvPr id="9" name="Shape 7"/>
+          <p:cNvSpPr/>
+          <p:nvPr/>
+        </p:nvSpPr>
+        <p:spPr>
+          <a:xfrm>
+            <a:off x="10515600" y="2130552"/>
+            <a:ext cx="868680" cy="493776"/>
+          </a:xfrm>
+          <a:prstGeom prst="roundRect">
+            <a:avLst>
+              <a:gd name="adj" fmla="val 18519"/>
+            </a:avLst>
+          </a:prstGeom>
+          <a:solidFill>
+            <a:srgbClr val="EEF2FB"/>
+          </a:solidFill>
+          <a:ln/>
+        </p:spPr>
+      </p:sp>
+      <p:sp>
+        <p:nvSpPr>
+          <p:cNvPr id="10" name="Text 8"/>
+          <p:cNvSpPr txBox="1"/>
+          <p:nvPr/>
+        </p:nvSpPr>
+        <p:spPr>
+          <a:xfrm>
+            <a:off x="10515600" y="2130552"/>
+            <a:ext cx="868680" cy="493776"/>
+          </a:xfrm>
+          <a:prstGeom prst="rect">
+            <a:avLst/>
+          </a:prstGeom>
+          <a:noFill/>
+          <a:ln/>
+        </p:spPr>
+        <p:txBody>
+          <a:bodyPr wrap="square" lIns="0" tIns="0" rIns="0" bIns="0" rtlCol="0" anchor="ctr"/>
+          <a:lstStyle/>
+          <a:p>
+            <a:pPr algn="ctr" indent="0" marL="0">
+              <a:buNone/>
+            </a:pPr>
+            <a:r>
+              <a:rPr lang="en-US" sz="1500" b="1" dirty="0">
+                <a:solidFill>
+                  <a:srgbClr val="2D63FF"/>
+                </a:solidFill>
+                <a:latin typeface="IBM Plex Mono" pitchFamily="34" charset="0"/>
+                <a:ea typeface="IBM Plex Mono" pitchFamily="34" charset="-122"/>
+                <a:cs typeface="IBM Plex Mono" pitchFamily="34" charset="-120"/>
+              </a:rPr>
+              <a:t>[3]</a:t>
+            </a:r>
+            <a:endParaRPr lang="en-US" sz="1500" dirty="0"/>
+          </a:p>
+        </p:txBody>
+      </p:sp>
+      <p:sp>
+        <p:nvSpPr>
+          <p:cNvPr id="11" name="Shape 9"/>
+          <p:cNvSpPr/>
+          <p:nvPr/>
+        </p:nvSpPr>
+        <p:spPr>
+          <a:xfrm>
+            <a:off x="502920" y="3127248"/>
+            <a:ext cx="11155680" cy="1097280"/>
+          </a:xfrm>
+          <a:prstGeom prst="roundRect">
+            <a:avLst>
+              <a:gd name="adj" fmla="val 10000"/>
+            </a:avLst>
+          </a:prstGeom>
+          <a:solidFill>
+            <a:srgbClr val="FFFFFF"/>
+          </a:solidFill>
+          <a:ln w="15875">
+            <a:solidFill>
+              <a:srgbClr val="D9DEE7"/>
+            </a:solidFill>
+            <a:prstDash val="solid"/>
+          </a:ln>
+        </p:spPr>
+      </p:sp>
+      <p:sp>
+        <p:nvSpPr>
+          <p:cNvPr id="12" name="Text 10"/>
+          <p:cNvSpPr txBox="1"/>
+          <p:nvPr/>
+        </p:nvSpPr>
+        <p:spPr>
+          <a:xfrm>
+            <a:off x="914400" y="3236976"/>
+            <a:ext cx="9418320" cy="877824"/>
+          </a:xfrm>
+          <a:prstGeom prst="rect">
+            <a:avLst/>
+          </a:prstGeom>
+          <a:noFill/>
+          <a:ln/>
+        </p:spPr>
+        <p:txBody>
+          <a:bodyPr wrap="square" lIns="0" tIns="0" rIns="0" bIns="0" rtlCol="0" anchor="ctr"/>
+          <a:lstStyle/>
+          <a:p>
+            <a:pPr indent="0" marL="0">
+              <a:lnSpc>
+                <a:spcPct val="118000"/>
+              </a:lnSpc>
+              <a:buNone/>
+            </a:pPr>
+            <a:r>
+              <a:rPr lang="en-US" sz="1700" dirty="0">
+                <a:solidFill>
+                  <a:srgbClr val="101828"/>
+                </a:solidFill>
+                <a:latin typeface="IBM Plex Sans" pitchFamily="34" charset="0"/>
+                <a:ea typeface="IBM Plex Sans" pitchFamily="34" charset="-122"/>
+                <a:cs typeface="IBM Plex Sans" pitchFamily="34" charset="-120"/>
+              </a:rPr>
+              <a:t>State one advantage of a linear search over a binary search.</a:t>
+            </a:r>
+            <a:endParaRPr lang="en-US" sz="1700" dirty="0"/>
+          </a:p>
+        </p:txBody>
+      </p:sp>
+      <p:sp>
+        <p:nvSpPr>
+          <p:cNvPr id="13" name="Shape 11"/>
+          <p:cNvSpPr/>
+          <p:nvPr/>
+        </p:nvSpPr>
+        <p:spPr>
+          <a:xfrm>
+            <a:off x="10515600" y="3429000"/>
+            <a:ext cx="868680" cy="493776"/>
+          </a:xfrm>
+          <a:prstGeom prst="roundRect">
+            <a:avLst>
+              <a:gd name="adj" fmla="val 18519"/>
+            </a:avLst>
+          </a:prstGeom>
+          <a:solidFill>
+            <a:srgbClr val="EEF2FB"/>
+          </a:solidFill>
+          <a:ln/>
+        </p:spPr>
+      </p:sp>
+      <p:sp>
+        <p:nvSpPr>
+          <p:cNvPr id="14" name="Text 12"/>
+          <p:cNvSpPr txBox="1"/>
+          <p:nvPr/>
+        </p:nvSpPr>
+        <p:spPr>
+          <a:xfrm>
+            <a:off x="10515600" y="3429000"/>
+            <a:ext cx="868680" cy="493776"/>
+          </a:xfrm>
+          <a:prstGeom prst="rect">
+            <a:avLst/>
+          </a:prstGeom>
+          <a:noFill/>
+          <a:ln/>
+        </p:spPr>
+        <p:txBody>
+          <a:bodyPr wrap="square" lIns="0" tIns="0" rIns="0" bIns="0" rtlCol="0" anchor="ctr"/>
+          <a:lstStyle/>
+          <a:p>
+            <a:pPr algn="ctr" indent="0" marL="0">
+              <a:buNone/>
+            </a:pPr>
+            <a:r>
+              <a:rPr lang="en-US" sz="1500" b="1" dirty="0">
+                <a:solidFill>
+                  <a:srgbClr val="2D63FF"/>
+                </a:solidFill>
+                <a:latin typeface="IBM Plex Mono" pitchFamily="34" charset="0"/>
+                <a:ea typeface="IBM Plex Mono" pitchFamily="34" charset="-122"/>
+                <a:cs typeface="IBM Plex Mono" pitchFamily="34" charset="-120"/>
+              </a:rPr>
+              <a:t>[1]</a:t>
+            </a:r>
+            <a:endParaRPr lang="en-US" sz="1500" dirty="0"/>
+          </a:p>
+        </p:txBody>
+      </p:sp>
+      <p:sp>
+        <p:nvSpPr>
+          <p:cNvPr id="15" name="Shape 13"/>
+          <p:cNvSpPr/>
+          <p:nvPr/>
+        </p:nvSpPr>
+        <p:spPr>
+          <a:xfrm>
+            <a:off x="502920" y="4425696"/>
+            <a:ext cx="11155680" cy="1097280"/>
+          </a:xfrm>
+          <a:prstGeom prst="roundRect">
+            <a:avLst>
+              <a:gd name="adj" fmla="val 10000"/>
+            </a:avLst>
+          </a:prstGeom>
+          <a:solidFill>
+            <a:srgbClr val="FFFFFF"/>
+          </a:solidFill>
+          <a:ln w="15875">
+            <a:solidFill>
+              <a:srgbClr val="D9DEE7"/>
+            </a:solidFill>
+            <a:prstDash val="solid"/>
+          </a:ln>
+        </p:spPr>
+      </p:sp>
+      <p:sp>
+        <p:nvSpPr>
+          <p:cNvPr id="16" name="Text 14"/>
+          <p:cNvSpPr txBox="1"/>
+          <p:nvPr/>
+        </p:nvSpPr>
+        <p:spPr>
+          <a:xfrm>
+            <a:off x="914400" y="4535424"/>
+            <a:ext cx="9418320" cy="877824"/>
+          </a:xfrm>
+          <a:prstGeom prst="rect">
+            <a:avLst/>
+          </a:prstGeom>
+          <a:noFill/>
+          <a:ln/>
+        </p:spPr>
+        <p:txBody>
+          <a:bodyPr wrap="square" lIns="0" tIns="0" rIns="0" bIns="0" rtlCol="0" anchor="ctr"/>
+          <a:lstStyle/>
+          <a:p>
+            <a:pPr indent="0" marL="0">
+              <a:lnSpc>
+                <a:spcPct val="118000"/>
+              </a:lnSpc>
+              <a:buNone/>
+            </a:pPr>
+            <a:r>
+              <a:rPr lang="en-US" sz="1700" dirty="0">
+                <a:solidFill>
+                  <a:srgbClr val="101828"/>
+                </a:solidFill>
+                <a:latin typeface="IBM Plex Sans" pitchFamily="34" charset="0"/>
+                <a:ea typeface="IBM Plex Sans" pitchFamily="34" charset="-122"/>
+                <a:cs typeface="IBM Plex Sans" pitchFamily="34" charset="-120"/>
+              </a:rPr>
+              <a:t>A list contains 2,000 unsorted items. Explain why a linear search may take a long time, and state the maximum number of comparisons needed.</a:t>
+            </a:r>
+            <a:endParaRPr lang="en-US" sz="1700" dirty="0"/>
+          </a:p>
+        </p:txBody>
+      </p:sp>
+      <p:sp>
+        <p:nvSpPr>
+          <p:cNvPr id="17" name="Shape 15"/>
+          <p:cNvSpPr/>
+          <p:nvPr/>
+        </p:nvSpPr>
+        <p:spPr>
+          <a:xfrm>
+            <a:off x="10515600" y="4727448"/>
+            <a:ext cx="868680" cy="493776"/>
+          </a:xfrm>
+          <a:prstGeom prst="roundRect">
+            <a:avLst>
+              <a:gd name="adj" fmla="val 18519"/>
+            </a:avLst>
+          </a:prstGeom>
+          <a:solidFill>
+            <a:srgbClr val="EEF2FB"/>
+          </a:solidFill>
+          <a:ln/>
+        </p:spPr>
+      </p:sp>
+      <p:sp>
+        <p:nvSpPr>
+          <p:cNvPr id="18" name="Text 16"/>
+          <p:cNvSpPr txBox="1"/>
+          <p:nvPr/>
+        </p:nvSpPr>
+        <p:spPr>
+          <a:xfrm>
+            <a:off x="10515600" y="4727448"/>
+            <a:ext cx="868680" cy="493776"/>
+          </a:xfrm>
+          <a:prstGeom prst="rect">
+            <a:avLst/>
+          </a:prstGeom>
+          <a:noFill/>
+          <a:ln/>
+        </p:spPr>
+        <p:txBody>
+          <a:bodyPr wrap="square" lIns="0" tIns="0" rIns="0" bIns="0" rtlCol="0" anchor="ctr"/>
+          <a:lstStyle/>
+          <a:p>
+            <a:pPr algn="ctr" indent="0" marL="0">
+              <a:buNone/>
+            </a:pPr>
+            <a:r>
+              <a:rPr lang="en-US" sz="1500" b="1" dirty="0">
+                <a:solidFill>
+                  <a:srgbClr val="2D63FF"/>
+                </a:solidFill>
+                <a:latin typeface="IBM Plex Mono" pitchFamily="34" charset="0"/>
+                <a:ea typeface="IBM Plex Mono" pitchFamily="34" charset="-122"/>
+                <a:cs typeface="IBM Plex Mono" pitchFamily="34" charset="-120"/>
+              </a:rPr>
+              <a:t>[4]</a:t>
+            </a:r>
+            <a:endParaRPr lang="en-US" sz="1500" dirty="0"/>
+          </a:p>
+        </p:txBody>
+      </p:sp>
+    </p:spTree>
+  </p:cSld>
+  <p:clrMapOvr>
+    <a:masterClrMapping/>
+  </p:clrMapOvr>
+</p:sld>
+</file>
+
+<file path=ppt/slides/slide15.xml><?xml version="1.0" encoding="utf-8"?>
+<p:sld xmlns:a="http://schemas.openxmlformats.org/drawingml/2006/main" xmlns:r="http://schemas.openxmlformats.org/officeDocument/2006/relationships" xmlns:p="http://schemas.openxmlformats.org/presentationml/2006/main">
+  <p:cSld name="Slide 15">
     <p:bg>
       <p:bgPr>
         <a:solidFill>
